--- a/docs/planning/hiagent-leadership-report/v7-illustrated/第七页样稿/第07页-功能全景-技能样稿.pptx
+++ b/docs/planning/hiagent-leadership-report/v7-illustrated/第七页样稿/第07页-功能全景-技能样稿.pptx
@@ -4161,8 +4161,8 @@
         </p:nvSpPr>
         <p:spPr>
           <a:xfrm>
-            <a:off x="347472" y="1444752"/>
-            <a:ext cx="4315968" cy="3877056"/>
+            <a:off x="310896" y="1463040"/>
+            <a:ext cx="6912864" cy="3877056"/>
           </a:xfrm>
           <a:prstGeom prst="roundRect">
             <a:avLst>
@@ -4215,8 +4215,8 @@
         </p:nvSpPr>
         <p:spPr>
           <a:xfrm>
-            <a:off x="493776" y="1536192"/>
-            <a:ext cx="4023359" cy="310896"/>
+            <a:off x="457200" y="1536192"/>
+            <a:ext cx="6620255" cy="274320"/>
           </a:xfrm>
           <a:prstGeom prst="rect">
             <a:avLst/>
@@ -4259,8 +4259,8 @@
         </p:nvSpPr>
         <p:spPr>
           <a:xfrm>
-            <a:off x="493776" y="1847088"/>
-            <a:ext cx="4023359" cy="256032"/>
+            <a:off x="457200" y="1810512"/>
+            <a:ext cx="6620255" cy="219456"/>
           </a:xfrm>
           <a:prstGeom prst="rect">
             <a:avLst/>
@@ -4303,8 +4303,8 @@
         </p:nvCxnSpPr>
         <p:spPr>
           <a:xfrm>
-            <a:off x="493776" y="2176272"/>
-            <a:ext cx="4023360" cy="0"/>
+            <a:off x="457200" y="2066544"/>
+            <a:ext cx="6620255" cy="0"/>
           </a:xfrm>
           <a:prstGeom prst="line">
             <a:avLst/>
@@ -4338,8 +4338,8 @@
         </p:nvSpPr>
         <p:spPr>
           <a:xfrm>
-            <a:off x="493776" y="2286000"/>
-            <a:ext cx="4023359" cy="1280160"/>
+            <a:off x="457200" y="2157984"/>
+            <a:ext cx="6620255" cy="1444752"/>
           </a:xfrm>
           <a:prstGeom prst="roundRect">
             <a:avLst>
@@ -4385,8 +4385,8 @@
         </p:nvSpPr>
         <p:spPr>
           <a:xfrm>
-            <a:off x="621792" y="2414016"/>
-            <a:ext cx="365760" cy="365760"/>
+            <a:off x="603504" y="2304288"/>
+            <a:ext cx="384048" cy="384048"/>
           </a:xfrm>
           <a:prstGeom prst="ellipse">
             <a:avLst/>
@@ -4428,8 +4428,8 @@
         </p:nvSpPr>
         <p:spPr>
           <a:xfrm>
-            <a:off x="702259" y="2494483"/>
-            <a:ext cx="204825" cy="204825"/>
+            <a:off x="687994" y="2388778"/>
+            <a:ext cx="215066" cy="215066"/>
           </a:xfrm>
           <a:prstGeom prst="can">
             <a:avLst/>
@@ -4471,8 +4471,8 @@
         </p:nvSpPr>
         <p:spPr>
           <a:xfrm>
-            <a:off x="1097280" y="2377440"/>
-            <a:ext cx="1965960" cy="292608"/>
+            <a:off x="1115568" y="2286000"/>
+            <a:ext cx="3108960" cy="329184"/>
           </a:xfrm>
           <a:prstGeom prst="rect">
             <a:avLst/>
@@ -4486,6 +4486,277 @@
           <a:lstStyle/>
           <a:p>
             <a:pPr algn="l">
+              <a:spcBef>
+                <a:spcPts val="0"/>
+              </a:spcBef>
+              <a:spcAft>
+                <a:spcPts val="0"/>
+              </a:spcAft>
+            </a:pPr>
+            <a:r>
+              <a:rPr sz="2000" b="1">
+                <a:solidFill>
+                  <a:srgbClr val="0E2A47"/>
+                </a:solidFill>
+                <a:latin typeface="Noto Sans CJK SC"/>
+                <a:ea typeface="Noto Sans CJK SC"/>
+                <a:cs typeface="Noto Sans CJK SC"/>
+              </a:rPr>
+              <a:t>资产Agent</a:t>
+            </a:r>
+          </a:p>
+        </p:txBody>
+      </p:sp>
+      <p:sp>
+        <p:nvSpPr>
+          <p:cNvPr id="24" name="Rounded Rectangle 23"/>
+          <p:cNvSpPr/>
+          <p:nvPr/>
+        </p:nvSpPr>
+        <p:spPr>
+          <a:xfrm>
+            <a:off x="6236207" y="2322576"/>
+            <a:ext cx="676656" cy="274320"/>
+          </a:xfrm>
+          <a:prstGeom prst="roundRect">
+            <a:avLst>
+              <a:gd name="adj" fmla="val 50000"/>
+            </a:avLst>
+          </a:prstGeom>
+          <a:solidFill>
+            <a:srgbClr val="1A6FDB"/>
+          </a:solidFill>
+          <a:ln>
+            <a:noFill/>
+          </a:ln>
+        </p:spPr>
+        <p:style>
+          <a:lnRef idx="1">
+            <a:schemeClr val="accent1"/>
+          </a:lnRef>
+          <a:fillRef idx="3">
+            <a:schemeClr val="accent1"/>
+          </a:fillRef>
+          <a:effectRef idx="2">
+            <a:schemeClr val="accent1"/>
+          </a:effectRef>
+          <a:fontRef idx="minor">
+            <a:schemeClr val="lt1"/>
+          </a:fontRef>
+        </p:style>
+        <p:txBody>
+          <a:bodyPr rtlCol="0" anchor="ctr"/>
+          <a:lstStyle/>
+          <a:p>
+            <a:pPr algn="ctr"/>
+          </a:p>
+        </p:txBody>
+      </p:sp>
+      <p:sp>
+        <p:nvSpPr>
+          <p:cNvPr id="25" name="TextBox 24"/>
+          <p:cNvSpPr txBox="1"/>
+          <p:nvPr/>
+        </p:nvSpPr>
+        <p:spPr>
+          <a:xfrm>
+            <a:off x="6236207" y="2322576"/>
+            <a:ext cx="676656" cy="274320"/>
+          </a:xfrm>
+          <a:prstGeom prst="rect">
+            <a:avLst/>
+          </a:prstGeom>
+          <a:noFill/>
+        </p:spPr>
+        <p:txBody>
+          <a:bodyPr wrap="square" lIns="0" rIns="0" tIns="0" bIns="0" anchor="ctr">
+            <a:spAutoFit/>
+          </a:bodyPr>
+          <a:lstStyle/>
+          <a:p>
+            <a:pPr algn="ctr">
+              <a:spcBef>
+                <a:spcPts val="0"/>
+              </a:spcBef>
+              <a:spcAft>
+                <a:spcPts val="0"/>
+              </a:spcAft>
+            </a:pPr>
+            <a:r>
+              <a:rPr sz="1300" b="1">
+                <a:solidFill>
+                  <a:srgbClr val="FFFFFF"/>
+                </a:solidFill>
+                <a:latin typeface="Noto Sans CJK SC"/>
+                <a:ea typeface="Noto Sans CJK SC"/>
+                <a:cs typeface="Noto Sans CJK SC"/>
+              </a:rPr>
+              <a:t>当前</a:t>
+            </a:r>
+          </a:p>
+        </p:txBody>
+      </p:sp>
+      <p:sp>
+        <p:nvSpPr>
+          <p:cNvPr id="26" name="TextBox 25"/>
+          <p:cNvSpPr txBox="1"/>
+          <p:nvPr/>
+        </p:nvSpPr>
+        <p:spPr>
+          <a:xfrm>
+            <a:off x="1115568" y="2633472"/>
+            <a:ext cx="4937760" cy="256032"/>
+          </a:xfrm>
+          <a:prstGeom prst="rect">
+            <a:avLst/>
+          </a:prstGeom>
+          <a:noFill/>
+        </p:spPr>
+        <p:txBody>
+          <a:bodyPr wrap="square" lIns="0" rIns="0" tIns="0" bIns="0" anchor="ctr">
+            <a:spAutoFit/>
+          </a:bodyPr>
+          <a:lstStyle/>
+          <a:p>
+            <a:pPr algn="l">
+              <a:spcBef>
+                <a:spcPts val="0"/>
+              </a:spcBef>
+              <a:spcAft>
+                <a:spcPts val="0"/>
+              </a:spcAft>
+            </a:pPr>
+            <a:r>
+              <a:rPr sz="1300" b="0">
+                <a:solidFill>
+                  <a:srgbClr val="5C738C"/>
+                </a:solidFill>
+                <a:latin typeface="Noto Sans CJK SC"/>
+                <a:ea typeface="Noto Sans CJK SC"/>
+                <a:cs typeface="Noto Sans CJK SC"/>
+              </a:rPr>
+              <a:t>表字段、字典码值为内部能力</a:t>
+            </a:r>
+          </a:p>
+        </p:txBody>
+      </p:sp>
+      <p:sp>
+        <p:nvSpPr>
+          <p:cNvPr id="27" name="Rounded Rectangle 26"/>
+          <p:cNvSpPr/>
+          <p:nvPr/>
+        </p:nvSpPr>
+        <p:spPr>
+          <a:xfrm>
+            <a:off x="603504" y="3035808"/>
+            <a:ext cx="3099816" cy="420624"/>
+          </a:xfrm>
+          <a:prstGeom prst="roundRect">
+            <a:avLst>
+              <a:gd name="adj" fmla="val 12000"/>
+            </a:avLst>
+          </a:prstGeom>
+          <a:solidFill>
+            <a:srgbClr val="FFFFFF"/>
+          </a:solidFill>
+          <a:ln w="9525">
+            <a:solidFill>
+              <a:srgbClr val="C5DCF6"/>
+            </a:solidFill>
+          </a:ln>
+        </p:spPr>
+        <p:style>
+          <a:lnRef idx="1">
+            <a:schemeClr val="accent1"/>
+          </a:lnRef>
+          <a:fillRef idx="3">
+            <a:schemeClr val="accent1"/>
+          </a:fillRef>
+          <a:effectRef idx="2">
+            <a:schemeClr val="accent1"/>
+          </a:effectRef>
+          <a:fontRef idx="minor">
+            <a:schemeClr val="lt1"/>
+          </a:fontRef>
+        </p:style>
+        <p:txBody>
+          <a:bodyPr rtlCol="0" anchor="ctr"/>
+          <a:lstStyle/>
+          <a:p>
+            <a:pPr algn="ctr"/>
+          </a:p>
+        </p:txBody>
+      </p:sp>
+      <p:sp>
+        <p:nvSpPr>
+          <p:cNvPr id="28" name="Rounded Rectangle 27"/>
+          <p:cNvSpPr/>
+          <p:nvPr/>
+        </p:nvSpPr>
+        <p:spPr>
+          <a:xfrm>
+            <a:off x="3831335" y="3035808"/>
+            <a:ext cx="3099816" cy="420624"/>
+          </a:xfrm>
+          <a:prstGeom prst="roundRect">
+            <a:avLst>
+              <a:gd name="adj" fmla="val 12000"/>
+            </a:avLst>
+          </a:prstGeom>
+          <a:solidFill>
+            <a:srgbClr val="FFFFFF"/>
+          </a:solidFill>
+          <a:ln w="9525">
+            <a:solidFill>
+              <a:srgbClr val="C5DCF6"/>
+            </a:solidFill>
+          </a:ln>
+        </p:spPr>
+        <p:style>
+          <a:lnRef idx="1">
+            <a:schemeClr val="accent1"/>
+          </a:lnRef>
+          <a:fillRef idx="3">
+            <a:schemeClr val="accent1"/>
+          </a:fillRef>
+          <a:effectRef idx="2">
+            <a:schemeClr val="accent1"/>
+          </a:effectRef>
+          <a:fontRef idx="minor">
+            <a:schemeClr val="lt1"/>
+          </a:fontRef>
+        </p:style>
+        <p:txBody>
+          <a:bodyPr rtlCol="0" anchor="ctr"/>
+          <a:lstStyle/>
+          <a:p>
+            <a:pPr algn="ctr"/>
+          </a:p>
+        </p:txBody>
+      </p:sp>
+      <p:sp>
+        <p:nvSpPr>
+          <p:cNvPr id="29" name="TextBox 28"/>
+          <p:cNvSpPr txBox="1"/>
+          <p:nvPr/>
+        </p:nvSpPr>
+        <p:spPr>
+          <a:xfrm>
+            <a:off x="603504" y="3035808"/>
+            <a:ext cx="3099816" cy="420624"/>
+          </a:xfrm>
+          <a:prstGeom prst="rect">
+            <a:avLst/>
+          </a:prstGeom>
+          <a:noFill/>
+        </p:spPr>
+        <p:txBody>
+          <a:bodyPr wrap="square" lIns="0" rIns="0" tIns="0" bIns="0" anchor="ctr">
+            <a:spAutoFit/>
+          </a:bodyPr>
+          <a:lstStyle/>
+          <a:p>
+            <a:pPr algn="ctr">
               <a:spcBef>
                 <a:spcPts val="0"/>
               </a:spcBef>
@@ -4502,66 +4773,21 @@
                 <a:ea typeface="Noto Sans CJK SC"/>
                 <a:cs typeface="Noto Sans CJK SC"/>
               </a:rPr>
-              <a:t>数据资产Agent</a:t>
-            </a:r>
-          </a:p>
-        </p:txBody>
-      </p:sp>
-      <p:sp>
-        <p:nvSpPr>
-          <p:cNvPr id="24" name="Rounded Rectangle 23"/>
-          <p:cNvSpPr/>
-          <p:nvPr/>
-        </p:nvSpPr>
-        <p:spPr>
-          <a:xfrm>
-            <a:off x="3730752" y="2395728"/>
-            <a:ext cx="640080" cy="256032"/>
-          </a:xfrm>
-          <a:prstGeom prst="roundRect">
-            <a:avLst>
-              <a:gd name="adj" fmla="val 50000"/>
-            </a:avLst>
-          </a:prstGeom>
-          <a:solidFill>
-            <a:srgbClr val="1A6FDB"/>
-          </a:solidFill>
-          <a:ln>
-            <a:noFill/>
-          </a:ln>
-        </p:spPr>
-        <p:style>
-          <a:lnRef idx="1">
-            <a:schemeClr val="accent1"/>
-          </a:lnRef>
-          <a:fillRef idx="3">
-            <a:schemeClr val="accent1"/>
-          </a:fillRef>
-          <a:effectRef idx="2">
-            <a:schemeClr val="accent1"/>
-          </a:effectRef>
-          <a:fontRef idx="minor">
-            <a:schemeClr val="lt1"/>
-          </a:fontRef>
-        </p:style>
-        <p:txBody>
-          <a:bodyPr rtlCol="0" anchor="ctr"/>
-          <a:lstStyle/>
-          <a:p>
-            <a:pPr algn="ctr"/>
-          </a:p>
-        </p:txBody>
-      </p:sp>
-      <p:sp>
-        <p:nvSpPr>
-          <p:cNvPr id="25" name="TextBox 24"/>
+              <a:t>表字段</a:t>
+            </a:r>
+          </a:p>
+        </p:txBody>
+      </p:sp>
+      <p:sp>
+        <p:nvSpPr>
+          <p:cNvPr id="30" name="TextBox 29"/>
           <p:cNvSpPr txBox="1"/>
           <p:nvPr/>
         </p:nvSpPr>
         <p:spPr>
           <a:xfrm>
-            <a:off x="3730752" y="2395728"/>
-            <a:ext cx="640080" cy="256032"/>
+            <a:off x="3831335" y="3035808"/>
+            <a:ext cx="3099816" cy="420624"/>
           </a:xfrm>
           <a:prstGeom prst="rect">
             <a:avLst/>
@@ -4583,233 +4809,7 @@
               </a:spcAft>
             </a:pPr>
             <a:r>
-              <a:rPr sz="1200" b="1">
-                <a:solidFill>
-                  <a:srgbClr val="FFFFFF"/>
-                </a:solidFill>
-                <a:latin typeface="Noto Sans CJK SC"/>
-                <a:ea typeface="Noto Sans CJK SC"/>
-                <a:cs typeface="Noto Sans CJK SC"/>
-              </a:rPr>
-              <a:t>当前</a:t>
-            </a:r>
-          </a:p>
-        </p:txBody>
-      </p:sp>
-      <p:sp>
-        <p:nvSpPr>
-          <p:cNvPr id="26" name="TextBox 25"/>
-          <p:cNvSpPr txBox="1"/>
-          <p:nvPr/>
-        </p:nvSpPr>
-        <p:spPr>
-          <a:xfrm>
-            <a:off x="1097280" y="2670048"/>
-            <a:ext cx="3200400" cy="237744"/>
-          </a:xfrm>
-          <a:prstGeom prst="rect">
-            <a:avLst/>
-          </a:prstGeom>
-          <a:noFill/>
-        </p:spPr>
-        <p:txBody>
-          <a:bodyPr wrap="square" lIns="0" rIns="0" tIns="0" bIns="0" anchor="ctr">
-            <a:spAutoFit/>
-          </a:bodyPr>
-          <a:lstStyle/>
-          <a:p>
-            <a:pPr algn="l">
-              <a:spcBef>
-                <a:spcPts val="0"/>
-              </a:spcBef>
-              <a:spcAft>
-                <a:spcPts val="0"/>
-              </a:spcAft>
-            </a:pPr>
-            <a:r>
-              <a:rPr sz="1200" b="0">
-                <a:solidFill>
-                  <a:srgbClr val="5C738C"/>
-                </a:solidFill>
-                <a:latin typeface="Noto Sans CJK SC"/>
-                <a:ea typeface="Noto Sans CJK SC"/>
-                <a:cs typeface="Noto Sans CJK SC"/>
-              </a:rPr>
-              <a:t>表字段、字典码值为内部能力</a:t>
-            </a:r>
-          </a:p>
-        </p:txBody>
-      </p:sp>
-      <p:sp>
-        <p:nvSpPr>
-          <p:cNvPr id="27" name="Rounded Rectangle 26"/>
-          <p:cNvSpPr/>
-          <p:nvPr/>
-        </p:nvSpPr>
-        <p:spPr>
-          <a:xfrm>
-            <a:off x="621792" y="3054096"/>
-            <a:ext cx="1828799" cy="384048"/>
-          </a:xfrm>
-          <a:prstGeom prst="roundRect">
-            <a:avLst>
-              <a:gd name="adj" fmla="val 12000"/>
-            </a:avLst>
-          </a:prstGeom>
-          <a:solidFill>
-            <a:srgbClr val="FFFFFF"/>
-          </a:solidFill>
-          <a:ln w="9525">
-            <a:solidFill>
-              <a:srgbClr val="C5DCF6"/>
-            </a:solidFill>
-          </a:ln>
-        </p:spPr>
-        <p:style>
-          <a:lnRef idx="1">
-            <a:schemeClr val="accent1"/>
-          </a:lnRef>
-          <a:fillRef idx="3">
-            <a:schemeClr val="accent1"/>
-          </a:fillRef>
-          <a:effectRef idx="2">
-            <a:schemeClr val="accent1"/>
-          </a:effectRef>
-          <a:fontRef idx="minor">
-            <a:schemeClr val="lt1"/>
-          </a:fontRef>
-        </p:style>
-        <p:txBody>
-          <a:bodyPr rtlCol="0" anchor="ctr"/>
-          <a:lstStyle/>
-          <a:p>
-            <a:pPr algn="ctr"/>
-          </a:p>
-        </p:txBody>
-      </p:sp>
-      <p:sp>
-        <p:nvSpPr>
-          <p:cNvPr id="28" name="Rounded Rectangle 27"/>
-          <p:cNvSpPr/>
-          <p:nvPr/>
-        </p:nvSpPr>
-        <p:spPr>
-          <a:xfrm>
-            <a:off x="2560320" y="3054096"/>
-            <a:ext cx="1828799" cy="384048"/>
-          </a:xfrm>
-          <a:prstGeom prst="roundRect">
-            <a:avLst>
-              <a:gd name="adj" fmla="val 12000"/>
-            </a:avLst>
-          </a:prstGeom>
-          <a:solidFill>
-            <a:srgbClr val="FFFFFF"/>
-          </a:solidFill>
-          <a:ln w="9525">
-            <a:solidFill>
-              <a:srgbClr val="C5DCF6"/>
-            </a:solidFill>
-          </a:ln>
-        </p:spPr>
-        <p:style>
-          <a:lnRef idx="1">
-            <a:schemeClr val="accent1"/>
-          </a:lnRef>
-          <a:fillRef idx="3">
-            <a:schemeClr val="accent1"/>
-          </a:fillRef>
-          <a:effectRef idx="2">
-            <a:schemeClr val="accent1"/>
-          </a:effectRef>
-          <a:fontRef idx="minor">
-            <a:schemeClr val="lt1"/>
-          </a:fontRef>
-        </p:style>
-        <p:txBody>
-          <a:bodyPr rtlCol="0" anchor="ctr"/>
-          <a:lstStyle/>
-          <a:p>
-            <a:pPr algn="ctr"/>
-          </a:p>
-        </p:txBody>
-      </p:sp>
-      <p:sp>
-        <p:nvSpPr>
-          <p:cNvPr id="29" name="TextBox 28"/>
-          <p:cNvSpPr txBox="1"/>
-          <p:nvPr/>
-        </p:nvSpPr>
-        <p:spPr>
-          <a:xfrm>
-            <a:off x="621792" y="3054096"/>
-            <a:ext cx="1828799" cy="384048"/>
-          </a:xfrm>
-          <a:prstGeom prst="rect">
-            <a:avLst/>
-          </a:prstGeom>
-          <a:noFill/>
-        </p:spPr>
-        <p:txBody>
-          <a:bodyPr wrap="square" lIns="0" rIns="0" tIns="0" bIns="0" anchor="ctr">
-            <a:spAutoFit/>
-          </a:bodyPr>
-          <a:lstStyle/>
-          <a:p>
-            <a:pPr algn="ctr">
-              <a:spcBef>
-                <a:spcPts val="0"/>
-              </a:spcBef>
-              <a:spcAft>
-                <a:spcPts val="0"/>
-              </a:spcAft>
-            </a:pPr>
-            <a:r>
-              <a:rPr sz="1400" b="1">
-                <a:solidFill>
-                  <a:srgbClr val="0E2A47"/>
-                </a:solidFill>
-                <a:latin typeface="Noto Sans CJK SC"/>
-                <a:ea typeface="Noto Sans CJK SC"/>
-                <a:cs typeface="Noto Sans CJK SC"/>
-              </a:rPr>
-              <a:t>表字段</a:t>
-            </a:r>
-          </a:p>
-        </p:txBody>
-      </p:sp>
-      <p:sp>
-        <p:nvSpPr>
-          <p:cNvPr id="30" name="TextBox 29"/>
-          <p:cNvSpPr txBox="1"/>
-          <p:nvPr/>
-        </p:nvSpPr>
-        <p:spPr>
-          <a:xfrm>
-            <a:off x="2560320" y="3054096"/>
-            <a:ext cx="1828799" cy="384048"/>
-          </a:xfrm>
-          <a:prstGeom prst="rect">
-            <a:avLst/>
-          </a:prstGeom>
-          <a:noFill/>
-        </p:spPr>
-        <p:txBody>
-          <a:bodyPr wrap="square" lIns="0" rIns="0" tIns="0" bIns="0" anchor="ctr">
-            <a:spAutoFit/>
-          </a:bodyPr>
-          <a:lstStyle/>
-          <a:p>
-            <a:pPr algn="ctr">
-              <a:spcBef>
-                <a:spcPts val="0"/>
-              </a:spcBef>
-              <a:spcAft>
-                <a:spcPts val="0"/>
-              </a:spcAft>
-            </a:pPr>
-            <a:r>
-              <a:rPr sz="1400" b="1">
+              <a:rPr sz="1600" b="1">
                 <a:solidFill>
                   <a:srgbClr val="0E2A47"/>
                 </a:solidFill>
@@ -4830,8 +4830,8 @@
         </p:nvSpPr>
         <p:spPr>
           <a:xfrm>
-            <a:off x="493776" y="3675887"/>
-            <a:ext cx="4023359" cy="237744"/>
+            <a:off x="457200" y="3694176"/>
+            <a:ext cx="6620255" cy="237744"/>
           </a:xfrm>
           <a:prstGeom prst="rect">
             <a:avLst/>
@@ -4845,6 +4845,184 @@
           <a:lstStyle/>
           <a:p>
             <a:pPr algn="l">
+              <a:spcBef>
+                <a:spcPts val="0"/>
+              </a:spcBef>
+              <a:spcAft>
+                <a:spcPts val="0"/>
+              </a:spcAft>
+            </a:pPr>
+            <a:r>
+              <a:rPr sz="1300" b="1">
+                <a:solidFill>
+                  <a:srgbClr val="5C738C"/>
+                </a:solidFill>
+                <a:latin typeface="Noto Sans CJK SC"/>
+                <a:ea typeface="Noto Sans CJK SC"/>
+                <a:cs typeface="Noto Sans CJK SC"/>
+              </a:rPr>
+              <a:t>与资产Agent同级</a:t>
+            </a:r>
+          </a:p>
+        </p:txBody>
+      </p:sp>
+      <p:sp>
+        <p:nvSpPr>
+          <p:cNvPr id="32" name="Rounded Rectangle 31"/>
+          <p:cNvSpPr/>
+          <p:nvPr/>
+        </p:nvSpPr>
+        <p:spPr>
+          <a:xfrm>
+            <a:off x="457200" y="3968496"/>
+            <a:ext cx="2133599" cy="1225295"/>
+          </a:xfrm>
+          <a:prstGeom prst="roundRect">
+            <a:avLst>
+              <a:gd name="adj" fmla="val 10000"/>
+            </a:avLst>
+          </a:prstGeom>
+          <a:solidFill>
+            <a:srgbClr val="F5F9FD"/>
+          </a:solidFill>
+          <a:ln>
+            <a:noFill/>
+          </a:ln>
+        </p:spPr>
+        <p:style>
+          <a:lnRef idx="1">
+            <a:schemeClr val="accent1"/>
+          </a:lnRef>
+          <a:fillRef idx="3">
+            <a:schemeClr val="accent1"/>
+          </a:fillRef>
+          <a:effectRef idx="2">
+            <a:schemeClr val="accent1"/>
+          </a:effectRef>
+          <a:fontRef idx="minor">
+            <a:schemeClr val="lt1"/>
+          </a:fontRef>
+        </p:style>
+        <p:txBody>
+          <a:bodyPr rtlCol="0" anchor="ctr"/>
+          <a:lstStyle/>
+          <a:p>
+            <a:pPr algn="ctr"/>
+          </a:p>
+        </p:txBody>
+      </p:sp>
+      <p:sp>
+        <p:nvSpPr>
+          <p:cNvPr id="33" name="TextBox 32"/>
+          <p:cNvSpPr txBox="1"/>
+          <p:nvPr/>
+        </p:nvSpPr>
+        <p:spPr>
+          <a:xfrm>
+            <a:off x="566928" y="4059935"/>
+            <a:ext cx="1347215" cy="292608"/>
+          </a:xfrm>
+          <a:prstGeom prst="rect">
+            <a:avLst/>
+          </a:prstGeom>
+          <a:noFill/>
+        </p:spPr>
+        <p:txBody>
+          <a:bodyPr wrap="square" lIns="0" rIns="0" tIns="0" bIns="0" anchor="ctr">
+            <a:spAutoFit/>
+          </a:bodyPr>
+          <a:lstStyle/>
+          <a:p>
+            <a:pPr algn="l">
+              <a:spcBef>
+                <a:spcPts val="0"/>
+              </a:spcBef>
+              <a:spcAft>
+                <a:spcPts val="0"/>
+              </a:spcAft>
+            </a:pPr>
+            <a:r>
+              <a:rPr sz="1500" b="1">
+                <a:solidFill>
+                  <a:srgbClr val="0E2A47"/>
+                </a:solidFill>
+                <a:latin typeface="Noto Sans CJK SC"/>
+                <a:ea typeface="Noto Sans CJK SC"/>
+                <a:cs typeface="Noto Sans CJK SC"/>
+              </a:rPr>
+              <a:t>生产</a:t>
+            </a:r>
+          </a:p>
+        </p:txBody>
+      </p:sp>
+      <p:sp>
+        <p:nvSpPr>
+          <p:cNvPr id="34" name="Rounded Rectangle 33"/>
+          <p:cNvSpPr/>
+          <p:nvPr/>
+        </p:nvSpPr>
+        <p:spPr>
+          <a:xfrm>
+            <a:off x="1914143" y="4078224"/>
+            <a:ext cx="548640" cy="256032"/>
+          </a:xfrm>
+          <a:prstGeom prst="roundRect">
+            <a:avLst>
+              <a:gd name="adj" fmla="val 50000"/>
+            </a:avLst>
+          </a:prstGeom>
+          <a:solidFill>
+            <a:srgbClr val="EEF2F6"/>
+          </a:solidFill>
+          <a:ln>
+            <a:noFill/>
+          </a:ln>
+        </p:spPr>
+        <p:style>
+          <a:lnRef idx="1">
+            <a:schemeClr val="accent1"/>
+          </a:lnRef>
+          <a:fillRef idx="3">
+            <a:schemeClr val="accent1"/>
+          </a:fillRef>
+          <a:effectRef idx="2">
+            <a:schemeClr val="accent1"/>
+          </a:effectRef>
+          <a:fontRef idx="minor">
+            <a:schemeClr val="lt1"/>
+          </a:fontRef>
+        </p:style>
+        <p:txBody>
+          <a:bodyPr rtlCol="0" anchor="ctr"/>
+          <a:lstStyle/>
+          <a:p>
+            <a:pPr algn="ctr"/>
+          </a:p>
+        </p:txBody>
+      </p:sp>
+      <p:sp>
+        <p:nvSpPr>
+          <p:cNvPr id="35" name="TextBox 34"/>
+          <p:cNvSpPr txBox="1"/>
+          <p:nvPr/>
+        </p:nvSpPr>
+        <p:spPr>
+          <a:xfrm>
+            <a:off x="1914143" y="4078224"/>
+            <a:ext cx="548640" cy="256032"/>
+          </a:xfrm>
+          <a:prstGeom prst="rect">
+            <a:avLst/>
+          </a:prstGeom>
+          <a:noFill/>
+        </p:spPr>
+        <p:txBody>
+          <a:bodyPr wrap="square" lIns="0" rIns="0" tIns="0" bIns="0" anchor="ctr">
+            <a:spAutoFit/>
+          </a:bodyPr>
+          <a:lstStyle/>
+          <a:p>
+            <a:pPr algn="ctr">
               <a:spcBef>
                 <a:spcPts val="0"/>
               </a:spcBef>
@@ -4861,110 +5039,21 @@
                 <a:ea typeface="Noto Sans CJK SC"/>
                 <a:cs typeface="Noto Sans CJK SC"/>
               </a:rPr>
-              <a:t>与资产Agent同级</a:t>
-            </a:r>
-          </a:p>
-        </p:txBody>
-      </p:sp>
-      <p:sp>
-        <p:nvSpPr>
-          <p:cNvPr id="32" name="Rounded Rectangle 31"/>
-          <p:cNvSpPr/>
-          <p:nvPr/>
-        </p:nvSpPr>
-        <p:spPr>
-          <a:xfrm>
-            <a:off x="493776" y="3950207"/>
-            <a:ext cx="4023359" cy="365760"/>
-          </a:xfrm>
-          <a:prstGeom prst="roundRect">
-            <a:avLst>
-              <a:gd name="adj" fmla="val 10000"/>
-            </a:avLst>
-          </a:prstGeom>
-          <a:solidFill>
-            <a:srgbClr val="F5F9FD"/>
-          </a:solidFill>
-          <a:ln>
-            <a:noFill/>
-          </a:ln>
-        </p:spPr>
-        <p:style>
-          <a:lnRef idx="1">
-            <a:schemeClr val="accent1"/>
-          </a:lnRef>
-          <a:fillRef idx="3">
-            <a:schemeClr val="accent1"/>
-          </a:fillRef>
-          <a:effectRef idx="2">
-            <a:schemeClr val="accent1"/>
-          </a:effectRef>
-          <a:fontRef idx="minor">
-            <a:schemeClr val="lt1"/>
-          </a:fontRef>
-        </p:style>
-        <p:txBody>
-          <a:bodyPr rtlCol="0" anchor="ctr"/>
-          <a:lstStyle/>
-          <a:p>
-            <a:pPr algn="ctr"/>
-          </a:p>
-        </p:txBody>
-      </p:sp>
-      <p:sp>
-        <p:nvSpPr>
-          <p:cNvPr id="33" name="TextBox 32"/>
+              <a:t>规划</a:t>
+            </a:r>
+          </a:p>
+        </p:txBody>
+      </p:sp>
+      <p:sp>
+        <p:nvSpPr>
+          <p:cNvPr id="36" name="TextBox 35"/>
           <p:cNvSpPr txBox="1"/>
           <p:nvPr/>
         </p:nvSpPr>
         <p:spPr>
           <a:xfrm>
-            <a:off x="621792" y="3950207"/>
-            <a:ext cx="1051560" cy="365760"/>
-          </a:xfrm>
-          <a:prstGeom prst="rect">
-            <a:avLst/>
-          </a:prstGeom>
-          <a:noFill/>
-        </p:spPr>
-        <p:txBody>
-          <a:bodyPr wrap="square" lIns="0" rIns="0" tIns="0" bIns="0" anchor="ctr">
-            <a:spAutoFit/>
-          </a:bodyPr>
-          <a:lstStyle/>
-          <a:p>
-            <a:pPr algn="l">
-              <a:spcBef>
-                <a:spcPts val="0"/>
-              </a:spcBef>
-              <a:spcAft>
-                <a:spcPts val="0"/>
-              </a:spcAft>
-            </a:pPr>
-            <a:r>
-              <a:rPr sz="1400" b="1">
-                <a:solidFill>
-                  <a:srgbClr val="0E2A47"/>
-                </a:solidFill>
-                <a:latin typeface="Noto Sans CJK SC"/>
-                <a:ea typeface="Noto Sans CJK SC"/>
-                <a:cs typeface="Noto Sans CJK SC"/>
-              </a:rPr>
-              <a:t>生产</a:t>
-            </a:r>
-          </a:p>
-        </p:txBody>
-      </p:sp>
-      <p:sp>
-        <p:nvSpPr>
-          <p:cNvPr id="34" name="TextBox 33"/>
-          <p:cNvSpPr txBox="1"/>
-          <p:nvPr/>
-        </p:nvSpPr>
-        <p:spPr>
-          <a:xfrm>
-            <a:off x="1673352" y="3950207"/>
-            <a:ext cx="1965960" cy="365760"/>
+            <a:off x="566928" y="4407408"/>
+            <a:ext cx="1914143" cy="365760"/>
           </a:xfrm>
           <a:prstGeom prst="rect">
             <a:avLst/>
@@ -5001,14 +5090,103 @@
       </p:sp>
       <p:sp>
         <p:nvSpPr>
-          <p:cNvPr id="35" name="Rounded Rectangle 34"/>
+          <p:cNvPr id="37" name="Rounded Rectangle 36"/>
           <p:cNvSpPr/>
           <p:nvPr/>
         </p:nvSpPr>
         <p:spPr>
           <a:xfrm>
-            <a:off x="3822191" y="4014215"/>
-            <a:ext cx="566928" cy="256032"/>
+            <a:off x="2700528" y="3968496"/>
+            <a:ext cx="2133599" cy="1225295"/>
+          </a:xfrm>
+          <a:prstGeom prst="roundRect">
+            <a:avLst>
+              <a:gd name="adj" fmla="val 10000"/>
+            </a:avLst>
+          </a:prstGeom>
+          <a:solidFill>
+            <a:srgbClr val="F5F9FD"/>
+          </a:solidFill>
+          <a:ln>
+            <a:noFill/>
+          </a:ln>
+        </p:spPr>
+        <p:style>
+          <a:lnRef idx="1">
+            <a:schemeClr val="accent1"/>
+          </a:lnRef>
+          <a:fillRef idx="3">
+            <a:schemeClr val="accent1"/>
+          </a:fillRef>
+          <a:effectRef idx="2">
+            <a:schemeClr val="accent1"/>
+          </a:effectRef>
+          <a:fontRef idx="minor">
+            <a:schemeClr val="lt1"/>
+          </a:fontRef>
+        </p:style>
+        <p:txBody>
+          <a:bodyPr rtlCol="0" anchor="ctr"/>
+          <a:lstStyle/>
+          <a:p>
+            <a:pPr algn="ctr"/>
+          </a:p>
+        </p:txBody>
+      </p:sp>
+      <p:sp>
+        <p:nvSpPr>
+          <p:cNvPr id="38" name="TextBox 37"/>
+          <p:cNvSpPr txBox="1"/>
+          <p:nvPr/>
+        </p:nvSpPr>
+        <p:spPr>
+          <a:xfrm>
+            <a:off x="2810256" y="4059935"/>
+            <a:ext cx="1347215" cy="292608"/>
+          </a:xfrm>
+          <a:prstGeom prst="rect">
+            <a:avLst/>
+          </a:prstGeom>
+          <a:noFill/>
+        </p:spPr>
+        <p:txBody>
+          <a:bodyPr wrap="square" lIns="0" rIns="0" tIns="0" bIns="0" anchor="ctr">
+            <a:spAutoFit/>
+          </a:bodyPr>
+          <a:lstStyle/>
+          <a:p>
+            <a:pPr algn="l">
+              <a:spcBef>
+                <a:spcPts val="0"/>
+              </a:spcBef>
+              <a:spcAft>
+                <a:spcPts val="0"/>
+              </a:spcAft>
+            </a:pPr>
+            <a:r>
+              <a:rPr sz="1500" b="1">
+                <a:solidFill>
+                  <a:srgbClr val="0E2A47"/>
+                </a:solidFill>
+                <a:latin typeface="Noto Sans CJK SC"/>
+                <a:ea typeface="Noto Sans CJK SC"/>
+                <a:cs typeface="Noto Sans CJK SC"/>
+              </a:rPr>
+              <a:t>交付</a:t>
+            </a:r>
+          </a:p>
+        </p:txBody>
+      </p:sp>
+      <p:sp>
+        <p:nvSpPr>
+          <p:cNvPr id="39" name="Rounded Rectangle 38"/>
+          <p:cNvSpPr/>
+          <p:nvPr/>
+        </p:nvSpPr>
+        <p:spPr>
+          <a:xfrm>
+            <a:off x="4157471" y="4078224"/>
+            <a:ext cx="548640" cy="256032"/>
           </a:xfrm>
           <a:prstGeom prst="roundRect">
             <a:avLst>
@@ -5046,14 +5224,14 @@
       </p:sp>
       <p:sp>
         <p:nvSpPr>
-          <p:cNvPr id="36" name="TextBox 35"/>
+          <p:cNvPr id="40" name="TextBox 39"/>
           <p:cNvSpPr txBox="1"/>
           <p:nvPr/>
         </p:nvSpPr>
         <p:spPr>
           <a:xfrm>
-            <a:off x="3822191" y="4014215"/>
-            <a:ext cx="566928" cy="256032"/>
+            <a:off x="4157471" y="4078224"/>
+            <a:ext cx="548640" cy="256032"/>
           </a:xfrm>
           <a:prstGeom prst="rect">
             <a:avLst/>
@@ -5075,7 +5253,7 @@
               </a:spcAft>
             </a:pPr>
             <a:r>
-              <a:rPr sz="1100" b="1">
+              <a:rPr sz="1200" b="1">
                 <a:solidFill>
                   <a:srgbClr val="5C738C"/>
                 </a:solidFill>
@@ -5090,103 +5268,14 @@
       </p:sp>
       <p:sp>
         <p:nvSpPr>
-          <p:cNvPr id="37" name="Rounded Rectangle 36"/>
-          <p:cNvSpPr/>
-          <p:nvPr/>
-        </p:nvSpPr>
-        <p:spPr>
-          <a:xfrm>
-            <a:off x="493776" y="4389120"/>
-            <a:ext cx="4023359" cy="365760"/>
-          </a:xfrm>
-          <a:prstGeom prst="roundRect">
-            <a:avLst>
-              <a:gd name="adj" fmla="val 10000"/>
-            </a:avLst>
-          </a:prstGeom>
-          <a:solidFill>
-            <a:srgbClr val="F5F9FD"/>
-          </a:solidFill>
-          <a:ln>
-            <a:noFill/>
-          </a:ln>
-        </p:spPr>
-        <p:style>
-          <a:lnRef idx="1">
-            <a:schemeClr val="accent1"/>
-          </a:lnRef>
-          <a:fillRef idx="3">
-            <a:schemeClr val="accent1"/>
-          </a:fillRef>
-          <a:effectRef idx="2">
-            <a:schemeClr val="accent1"/>
-          </a:effectRef>
-          <a:fontRef idx="minor">
-            <a:schemeClr val="lt1"/>
-          </a:fontRef>
-        </p:style>
-        <p:txBody>
-          <a:bodyPr rtlCol="0" anchor="ctr"/>
-          <a:lstStyle/>
-          <a:p>
-            <a:pPr algn="ctr"/>
-          </a:p>
-        </p:txBody>
-      </p:sp>
-      <p:sp>
-        <p:nvSpPr>
-          <p:cNvPr id="38" name="TextBox 37"/>
+          <p:cNvPr id="41" name="TextBox 40"/>
           <p:cNvSpPr txBox="1"/>
           <p:nvPr/>
         </p:nvSpPr>
         <p:spPr>
           <a:xfrm>
-            <a:off x="621792" y="4389120"/>
-            <a:ext cx="1051560" cy="365760"/>
-          </a:xfrm>
-          <a:prstGeom prst="rect">
-            <a:avLst/>
-          </a:prstGeom>
-          <a:noFill/>
-        </p:spPr>
-        <p:txBody>
-          <a:bodyPr wrap="square" lIns="0" rIns="0" tIns="0" bIns="0" anchor="ctr">
-            <a:spAutoFit/>
-          </a:bodyPr>
-          <a:lstStyle/>
-          <a:p>
-            <a:pPr algn="l">
-              <a:spcBef>
-                <a:spcPts val="0"/>
-              </a:spcBef>
-              <a:spcAft>
-                <a:spcPts val="0"/>
-              </a:spcAft>
-            </a:pPr>
-            <a:r>
-              <a:rPr sz="1400" b="1">
-                <a:solidFill>
-                  <a:srgbClr val="0E2A47"/>
-                </a:solidFill>
-                <a:latin typeface="Noto Sans CJK SC"/>
-                <a:ea typeface="Noto Sans CJK SC"/>
-                <a:cs typeface="Noto Sans CJK SC"/>
-              </a:rPr>
-              <a:t>交付</a:t>
-            </a:r>
-          </a:p>
-        </p:txBody>
-      </p:sp>
-      <p:sp>
-        <p:nvSpPr>
-          <p:cNvPr id="39" name="TextBox 38"/>
-          <p:cNvSpPr txBox="1"/>
-          <p:nvPr/>
-        </p:nvSpPr>
-        <p:spPr>
-          <a:xfrm>
-            <a:off x="1673352" y="4389120"/>
-            <a:ext cx="1965960" cy="365760"/>
+            <a:off x="2810256" y="4407408"/>
+            <a:ext cx="1914143" cy="365760"/>
           </a:xfrm>
           <a:prstGeom prst="rect">
             <a:avLst/>
@@ -5223,14 +5312,103 @@
       </p:sp>
       <p:sp>
         <p:nvSpPr>
-          <p:cNvPr id="40" name="Rounded Rectangle 39"/>
+          <p:cNvPr id="42" name="Rounded Rectangle 41"/>
           <p:cNvSpPr/>
           <p:nvPr/>
         </p:nvSpPr>
         <p:spPr>
           <a:xfrm>
-            <a:off x="3822191" y="4453128"/>
-            <a:ext cx="566928" cy="256032"/>
+            <a:off x="4943856" y="3968496"/>
+            <a:ext cx="2133599" cy="1225295"/>
+          </a:xfrm>
+          <a:prstGeom prst="roundRect">
+            <a:avLst>
+              <a:gd name="adj" fmla="val 10000"/>
+            </a:avLst>
+          </a:prstGeom>
+          <a:solidFill>
+            <a:srgbClr val="F5F9FD"/>
+          </a:solidFill>
+          <a:ln>
+            <a:noFill/>
+          </a:ln>
+        </p:spPr>
+        <p:style>
+          <a:lnRef idx="1">
+            <a:schemeClr val="accent1"/>
+          </a:lnRef>
+          <a:fillRef idx="3">
+            <a:schemeClr val="accent1"/>
+          </a:fillRef>
+          <a:effectRef idx="2">
+            <a:schemeClr val="accent1"/>
+          </a:effectRef>
+          <a:fontRef idx="minor">
+            <a:schemeClr val="lt1"/>
+          </a:fontRef>
+        </p:style>
+        <p:txBody>
+          <a:bodyPr rtlCol="0" anchor="ctr"/>
+          <a:lstStyle/>
+          <a:p>
+            <a:pPr algn="ctr"/>
+          </a:p>
+        </p:txBody>
+      </p:sp>
+      <p:sp>
+        <p:nvSpPr>
+          <p:cNvPr id="43" name="TextBox 42"/>
+          <p:cNvSpPr txBox="1"/>
+          <p:nvPr/>
+        </p:nvSpPr>
+        <p:spPr>
+          <a:xfrm>
+            <a:off x="5053584" y="4059935"/>
+            <a:ext cx="1347215" cy="292608"/>
+          </a:xfrm>
+          <a:prstGeom prst="rect">
+            <a:avLst/>
+          </a:prstGeom>
+          <a:noFill/>
+        </p:spPr>
+        <p:txBody>
+          <a:bodyPr wrap="square" lIns="0" rIns="0" tIns="0" bIns="0" anchor="ctr">
+            <a:spAutoFit/>
+          </a:bodyPr>
+          <a:lstStyle/>
+          <a:p>
+            <a:pPr algn="l">
+              <a:spcBef>
+                <a:spcPts val="0"/>
+              </a:spcBef>
+              <a:spcAft>
+                <a:spcPts val="0"/>
+              </a:spcAft>
+            </a:pPr>
+            <a:r>
+              <a:rPr sz="1500" b="1">
+                <a:solidFill>
+                  <a:srgbClr val="0E2A47"/>
+                </a:solidFill>
+                <a:latin typeface="Noto Sans CJK SC"/>
+                <a:ea typeface="Noto Sans CJK SC"/>
+                <a:cs typeface="Noto Sans CJK SC"/>
+              </a:rPr>
+              <a:t>运营分析</a:t>
+            </a:r>
+          </a:p>
+        </p:txBody>
+      </p:sp>
+      <p:sp>
+        <p:nvSpPr>
+          <p:cNvPr id="44" name="Rounded Rectangle 43"/>
+          <p:cNvSpPr/>
+          <p:nvPr/>
+        </p:nvSpPr>
+        <p:spPr>
+          <a:xfrm>
+            <a:off x="6400799" y="4078224"/>
+            <a:ext cx="548640" cy="256032"/>
           </a:xfrm>
           <a:prstGeom prst="roundRect">
             <a:avLst>
@@ -5268,14 +5446,14 @@
       </p:sp>
       <p:sp>
         <p:nvSpPr>
-          <p:cNvPr id="41" name="TextBox 40"/>
+          <p:cNvPr id="45" name="TextBox 44"/>
           <p:cNvSpPr txBox="1"/>
           <p:nvPr/>
         </p:nvSpPr>
         <p:spPr>
           <a:xfrm>
-            <a:off x="3822191" y="4453128"/>
-            <a:ext cx="566928" cy="256032"/>
+            <a:off x="6400799" y="4078224"/>
+            <a:ext cx="548640" cy="256032"/>
           </a:xfrm>
           <a:prstGeom prst="rect">
             <a:avLst/>
@@ -5297,7 +5475,7 @@
               </a:spcAft>
             </a:pPr>
             <a:r>
-              <a:rPr sz="1100" b="1">
+              <a:rPr sz="1200" b="1">
                 <a:solidFill>
                   <a:srgbClr val="5C738C"/>
                 </a:solidFill>
@@ -5312,103 +5490,14 @@
       </p:sp>
       <p:sp>
         <p:nvSpPr>
-          <p:cNvPr id="42" name="Rounded Rectangle 41"/>
-          <p:cNvSpPr/>
-          <p:nvPr/>
-        </p:nvSpPr>
-        <p:spPr>
-          <a:xfrm>
-            <a:off x="493776" y="4828032"/>
-            <a:ext cx="4023359" cy="365760"/>
-          </a:xfrm>
-          <a:prstGeom prst="roundRect">
-            <a:avLst>
-              <a:gd name="adj" fmla="val 10000"/>
-            </a:avLst>
-          </a:prstGeom>
-          <a:solidFill>
-            <a:srgbClr val="F5F9FD"/>
-          </a:solidFill>
-          <a:ln>
-            <a:noFill/>
-          </a:ln>
-        </p:spPr>
-        <p:style>
-          <a:lnRef idx="1">
-            <a:schemeClr val="accent1"/>
-          </a:lnRef>
-          <a:fillRef idx="3">
-            <a:schemeClr val="accent1"/>
-          </a:fillRef>
-          <a:effectRef idx="2">
-            <a:schemeClr val="accent1"/>
-          </a:effectRef>
-          <a:fontRef idx="minor">
-            <a:schemeClr val="lt1"/>
-          </a:fontRef>
-        </p:style>
-        <p:txBody>
-          <a:bodyPr rtlCol="0" anchor="ctr"/>
-          <a:lstStyle/>
-          <a:p>
-            <a:pPr algn="ctr"/>
-          </a:p>
-        </p:txBody>
-      </p:sp>
-      <p:sp>
-        <p:nvSpPr>
-          <p:cNvPr id="43" name="TextBox 42"/>
+          <p:cNvPr id="46" name="TextBox 45"/>
           <p:cNvSpPr txBox="1"/>
           <p:nvPr/>
         </p:nvSpPr>
         <p:spPr>
           <a:xfrm>
-            <a:off x="621792" y="4828032"/>
-            <a:ext cx="1051560" cy="365760"/>
-          </a:xfrm>
-          <a:prstGeom prst="rect">
-            <a:avLst/>
-          </a:prstGeom>
-          <a:noFill/>
-        </p:spPr>
-        <p:txBody>
-          <a:bodyPr wrap="square" lIns="0" rIns="0" tIns="0" bIns="0" anchor="ctr">
-            <a:spAutoFit/>
-          </a:bodyPr>
-          <a:lstStyle/>
-          <a:p>
-            <a:pPr algn="l">
-              <a:spcBef>
-                <a:spcPts val="0"/>
-              </a:spcBef>
-              <a:spcAft>
-                <a:spcPts val="0"/>
-              </a:spcAft>
-            </a:pPr>
-            <a:r>
-              <a:rPr sz="1400" b="1">
-                <a:solidFill>
-                  <a:srgbClr val="0E2A47"/>
-                </a:solidFill>
-                <a:latin typeface="Noto Sans CJK SC"/>
-                <a:ea typeface="Noto Sans CJK SC"/>
-                <a:cs typeface="Noto Sans CJK SC"/>
-              </a:rPr>
-              <a:t>运营分析</a:t>
-            </a:r>
-          </a:p>
-        </p:txBody>
-      </p:sp>
-      <p:sp>
-        <p:nvSpPr>
-          <p:cNvPr id="44" name="TextBox 43"/>
-          <p:cNvSpPr txBox="1"/>
-          <p:nvPr/>
-        </p:nvSpPr>
-        <p:spPr>
-          <a:xfrm>
-            <a:off x="1673352" y="4828032"/>
-            <a:ext cx="1965960" cy="365760"/>
+            <a:off x="5053584" y="4407408"/>
+            <a:ext cx="1914143" cy="365760"/>
           </a:xfrm>
           <a:prstGeom prst="rect">
             <a:avLst/>
@@ -5445,103 +5534,14 @@
       </p:sp>
       <p:sp>
         <p:nvSpPr>
-          <p:cNvPr id="45" name="Rounded Rectangle 44"/>
-          <p:cNvSpPr/>
-          <p:nvPr/>
-        </p:nvSpPr>
-        <p:spPr>
-          <a:xfrm>
-            <a:off x="3822191" y="4892040"/>
-            <a:ext cx="566928" cy="256032"/>
-          </a:xfrm>
-          <a:prstGeom prst="roundRect">
-            <a:avLst>
-              <a:gd name="adj" fmla="val 50000"/>
-            </a:avLst>
-          </a:prstGeom>
-          <a:solidFill>
-            <a:srgbClr val="EEF2F6"/>
-          </a:solidFill>
-          <a:ln>
-            <a:noFill/>
-          </a:ln>
-        </p:spPr>
-        <p:style>
-          <a:lnRef idx="1">
-            <a:schemeClr val="accent1"/>
-          </a:lnRef>
-          <a:fillRef idx="3">
-            <a:schemeClr val="accent1"/>
-          </a:fillRef>
-          <a:effectRef idx="2">
-            <a:schemeClr val="accent1"/>
-          </a:effectRef>
-          <a:fontRef idx="minor">
-            <a:schemeClr val="lt1"/>
-          </a:fontRef>
-        </p:style>
-        <p:txBody>
-          <a:bodyPr rtlCol="0" anchor="ctr"/>
-          <a:lstStyle/>
-          <a:p>
-            <a:pPr algn="ctr"/>
-          </a:p>
-        </p:txBody>
-      </p:sp>
-      <p:sp>
-        <p:nvSpPr>
-          <p:cNvPr id="46" name="TextBox 45"/>
-          <p:cNvSpPr txBox="1"/>
-          <p:nvPr/>
-        </p:nvSpPr>
-        <p:spPr>
-          <a:xfrm>
-            <a:off x="3822191" y="4892040"/>
-            <a:ext cx="566928" cy="256032"/>
-          </a:xfrm>
-          <a:prstGeom prst="rect">
-            <a:avLst/>
-          </a:prstGeom>
-          <a:noFill/>
-        </p:spPr>
-        <p:txBody>
-          <a:bodyPr wrap="square" lIns="0" rIns="0" tIns="0" bIns="0" anchor="ctr">
-            <a:spAutoFit/>
-          </a:bodyPr>
-          <a:lstStyle/>
-          <a:p>
-            <a:pPr algn="ctr">
-              <a:spcBef>
-                <a:spcPts val="0"/>
-              </a:spcBef>
-              <a:spcAft>
-                <a:spcPts val="0"/>
-              </a:spcAft>
-            </a:pPr>
-            <a:r>
-              <a:rPr sz="1100" b="1">
-                <a:solidFill>
-                  <a:srgbClr val="5C738C"/>
-                </a:solidFill>
-                <a:latin typeface="Noto Sans CJK SC"/>
-                <a:ea typeface="Noto Sans CJK SC"/>
-                <a:cs typeface="Noto Sans CJK SC"/>
-              </a:rPr>
-              <a:t>规划</a:t>
-            </a:r>
-          </a:p>
-        </p:txBody>
-      </p:sp>
-      <p:sp>
-        <p:nvSpPr>
           <p:cNvPr id="47" name="Rounded Rectangle 46"/>
           <p:cNvSpPr/>
           <p:nvPr/>
         </p:nvSpPr>
         <p:spPr>
           <a:xfrm>
-            <a:off x="4791456" y="1444752"/>
-            <a:ext cx="3611880" cy="3877056"/>
+            <a:off x="7351775" y="1463040"/>
+            <a:ext cx="4517136" cy="1792224"/>
           </a:xfrm>
           <a:prstGeom prst="roundRect">
             <a:avLst>
@@ -5594,8 +5594,8 @@
         </p:nvSpPr>
         <p:spPr>
           <a:xfrm>
-            <a:off x="4937760" y="1536192"/>
-            <a:ext cx="3319272" cy="310896"/>
+            <a:off x="7498079" y="1536192"/>
+            <a:ext cx="4224528" cy="274320"/>
           </a:xfrm>
           <a:prstGeom prst="rect">
             <a:avLst/>
@@ -5638,8 +5638,8 @@
         </p:nvSpPr>
         <p:spPr>
           <a:xfrm>
-            <a:off x="4937760" y="1847088"/>
-            <a:ext cx="3319272" cy="256032"/>
+            <a:off x="7498079" y="1810512"/>
+            <a:ext cx="4224528" cy="219456"/>
           </a:xfrm>
           <a:prstGeom prst="rect">
             <a:avLst/>
@@ -5682,8 +5682,8 @@
         </p:nvCxnSpPr>
         <p:spPr>
           <a:xfrm>
-            <a:off x="4937760" y="2176272"/>
-            <a:ext cx="3319272" cy="0"/>
+            <a:off x="7498079" y="2066544"/>
+            <a:ext cx="4224529" cy="0"/>
           </a:xfrm>
           <a:prstGeom prst="line">
             <a:avLst/>
@@ -5717,8 +5717,8 @@
         </p:nvSpPr>
         <p:spPr>
           <a:xfrm>
-            <a:off x="4937760" y="2286000"/>
-            <a:ext cx="3319272" cy="653796"/>
+            <a:off x="7498079" y="2157984"/>
+            <a:ext cx="2066544" cy="438911"/>
           </a:xfrm>
           <a:prstGeom prst="roundRect">
             <a:avLst>
@@ -5756,174 +5756,14 @@
       </p:sp>
       <p:sp>
         <p:nvSpPr>
-          <p:cNvPr id="52" name="Oval 51"/>
-          <p:cNvSpPr/>
-          <p:nvPr/>
-        </p:nvSpPr>
-        <p:spPr>
-          <a:xfrm>
-            <a:off x="5047488" y="2448306"/>
-            <a:ext cx="329184" cy="329184"/>
-          </a:xfrm>
-          <a:prstGeom prst="ellipse">
-            <a:avLst/>
-          </a:prstGeom>
-          <a:solidFill>
-            <a:srgbClr val="E8F2FC"/>
-          </a:solidFill>
-          <a:ln>
-            <a:noFill/>
-          </a:ln>
-        </p:spPr>
-        <p:style>
-          <a:lnRef idx="1">
-            <a:schemeClr val="accent1"/>
-          </a:lnRef>
-          <a:fillRef idx="3">
-            <a:schemeClr val="accent1"/>
-          </a:fillRef>
-          <a:effectRef idx="2">
-            <a:schemeClr val="accent1"/>
-          </a:effectRef>
-          <a:fontRef idx="minor">
-            <a:schemeClr val="lt1"/>
-          </a:fontRef>
-        </p:style>
-        <p:txBody>
-          <a:bodyPr rtlCol="0" anchor="ctr"/>
-          <a:lstStyle/>
-          <a:p>
-            <a:pPr algn="ctr"/>
-          </a:p>
-        </p:txBody>
-      </p:sp>
-      <p:sp>
-        <p:nvSpPr>
-          <p:cNvPr id="53" name="Rounded Rectangle 52"/>
-          <p:cNvSpPr/>
-          <p:nvPr/>
-        </p:nvSpPr>
-        <p:spPr>
-          <a:xfrm>
-            <a:off x="5142029" y="2520726"/>
-            <a:ext cx="140100" cy="184343"/>
-          </a:xfrm>
-          <a:prstGeom prst="roundRect">
-            <a:avLst>
-              <a:gd name="adj" fmla="val 8000"/>
-            </a:avLst>
-          </a:prstGeom>
-          <a:solidFill>
-            <a:srgbClr val="FFFFFF"/>
-          </a:solidFill>
-          <a:ln w="9525">
-            <a:solidFill>
-              <a:srgbClr val="1A6FDB"/>
-            </a:solidFill>
-          </a:ln>
-        </p:spPr>
-        <p:style>
-          <a:lnRef idx="1">
-            <a:schemeClr val="accent1"/>
-          </a:lnRef>
-          <a:fillRef idx="3">
-            <a:schemeClr val="accent1"/>
-          </a:fillRef>
-          <a:effectRef idx="2">
-            <a:schemeClr val="accent1"/>
-          </a:effectRef>
-          <a:fontRef idx="minor">
-            <a:schemeClr val="lt1"/>
-          </a:fontRef>
-        </p:style>
-        <p:txBody>
-          <a:bodyPr rtlCol="0" anchor="ctr"/>
-          <a:lstStyle/>
-          <a:p>
-            <a:pPr algn="ctr"/>
-          </a:p>
-        </p:txBody>
-      </p:sp>
-      <p:cxnSp>
-        <p:nvCxnSpPr>
-          <p:cNvPr id="54" name="Connector 53"/>
-          <p:cNvCxnSpPr/>
-          <p:nvPr/>
-        </p:nvCxnSpPr>
-        <p:spPr>
-          <a:xfrm>
-            <a:off x="5171524" y="2579716"/>
-            <a:ext cx="81111" cy="0"/>
-          </a:xfrm>
-          <a:prstGeom prst="line">
-            <a:avLst/>
-          </a:prstGeom>
-          <a:ln w="9525">
-            <a:solidFill>
-              <a:srgbClr val="1A6FDB"/>
-            </a:solidFill>
-          </a:ln>
-        </p:spPr>
-        <p:style>
-          <a:lnRef idx="2">
-            <a:schemeClr val="accent1"/>
-          </a:lnRef>
-          <a:fillRef idx="0">
-            <a:schemeClr val="accent1"/>
-          </a:fillRef>
-          <a:effectRef idx="1">
-            <a:schemeClr val="accent1"/>
-          </a:effectRef>
-          <a:fontRef idx="minor">
-            <a:schemeClr val="tx1"/>
-          </a:fontRef>
-        </p:style>
-      </p:cxnSp>
-      <p:cxnSp>
-        <p:nvCxnSpPr>
-          <p:cNvPr id="55" name="Connector 54"/>
-          <p:cNvCxnSpPr/>
-          <p:nvPr/>
-        </p:nvCxnSpPr>
-        <p:spPr>
-          <a:xfrm>
-            <a:off x="5171524" y="2622115"/>
-            <a:ext cx="81111" cy="0"/>
-          </a:xfrm>
-          <a:prstGeom prst="line">
-            <a:avLst/>
-          </a:prstGeom>
-          <a:ln w="9525">
-            <a:solidFill>
-              <a:srgbClr val="1A6FDB"/>
-            </a:solidFill>
-          </a:ln>
-        </p:spPr>
-        <p:style>
-          <a:lnRef idx="2">
-            <a:schemeClr val="accent1"/>
-          </a:lnRef>
-          <a:fillRef idx="0">
-            <a:schemeClr val="accent1"/>
-          </a:fillRef>
-          <a:effectRef idx="1">
-            <a:schemeClr val="accent1"/>
-          </a:effectRef>
-          <a:fontRef idx="minor">
-            <a:schemeClr val="tx1"/>
-          </a:fontRef>
-        </p:style>
-      </p:cxnSp>
-      <p:sp>
-        <p:nvSpPr>
-          <p:cNvPr id="56" name="TextBox 55"/>
+          <p:cNvPr id="52" name="TextBox 51"/>
           <p:cNvSpPr txBox="1"/>
           <p:nvPr/>
         </p:nvSpPr>
         <p:spPr>
           <a:xfrm>
-            <a:off x="5468112" y="2286000"/>
-            <a:ext cx="2679192" cy="653796"/>
+            <a:off x="7571231" y="2157984"/>
+            <a:ext cx="1920240" cy="438911"/>
           </a:xfrm>
           <a:prstGeom prst="rect">
             <a:avLst/>
@@ -5936,7 +5776,7 @@
           </a:bodyPr>
           <a:lstStyle/>
           <a:p>
-            <a:pPr algn="l">
+            <a:pPr algn="ctr">
               <a:spcBef>
                 <a:spcPts val="0"/>
               </a:spcBef>
@@ -5945,9 +5785,9 @@
               </a:spcAft>
             </a:pPr>
             <a:r>
-              <a:rPr sz="1400" b="1">
+              <a:rPr sz="1300" b="1">
                 <a:solidFill>
-                  <a:srgbClr val="16324A"/>
+                  <a:srgbClr val="0E2A47"/>
                 </a:solidFill>
                 <a:latin typeface="Noto Sans CJK SC"/>
                 <a:ea typeface="Noto Sans CJK SC"/>
@@ -5960,14 +5800,14 @@
       </p:sp>
       <p:sp>
         <p:nvSpPr>
-          <p:cNvPr id="57" name="Rounded Rectangle 56"/>
+          <p:cNvPr id="53" name="Rounded Rectangle 52"/>
           <p:cNvSpPr/>
           <p:nvPr/>
         </p:nvSpPr>
         <p:spPr>
           <a:xfrm>
-            <a:off x="4937760" y="3031236"/>
-            <a:ext cx="3319272" cy="653796"/>
+            <a:off x="9656063" y="2157984"/>
+            <a:ext cx="2066544" cy="438911"/>
           </a:xfrm>
           <a:prstGeom prst="roundRect">
             <a:avLst>
@@ -6005,139 +5845,14 @@
       </p:sp>
       <p:sp>
         <p:nvSpPr>
-          <p:cNvPr id="58" name="Oval 57"/>
-          <p:cNvSpPr/>
-          <p:nvPr/>
-        </p:nvSpPr>
-        <p:spPr>
-          <a:xfrm>
-            <a:off x="5047488" y="3193542"/>
-            <a:ext cx="329184" cy="329184"/>
-          </a:xfrm>
-          <a:prstGeom prst="ellipse">
-            <a:avLst/>
-          </a:prstGeom>
-          <a:solidFill>
-            <a:srgbClr val="E8F2FC"/>
-          </a:solidFill>
-          <a:ln>
-            <a:noFill/>
-          </a:ln>
-        </p:spPr>
-        <p:style>
-          <a:lnRef idx="1">
-            <a:schemeClr val="accent1"/>
-          </a:lnRef>
-          <a:fillRef idx="3">
-            <a:schemeClr val="accent1"/>
-          </a:fillRef>
-          <a:effectRef idx="2">
-            <a:schemeClr val="accent1"/>
-          </a:effectRef>
-          <a:fontRef idx="minor">
-            <a:schemeClr val="lt1"/>
-          </a:fontRef>
-        </p:style>
-        <p:txBody>
-          <a:bodyPr rtlCol="0" anchor="ctr"/>
-          <a:lstStyle/>
-          <a:p>
-            <a:pPr algn="ctr"/>
-          </a:p>
-        </p:txBody>
-      </p:sp>
-      <p:sp>
-        <p:nvSpPr>
-          <p:cNvPr id="59" name="Rounded Rectangle 58"/>
-          <p:cNvSpPr/>
-          <p:nvPr/>
-        </p:nvSpPr>
-        <p:spPr>
-          <a:xfrm>
-            <a:off x="5119908" y="3265962"/>
-            <a:ext cx="184343" cy="184343"/>
-          </a:xfrm>
-          <a:prstGeom prst="roundRect">
-            <a:avLst>
-              <a:gd name="adj" fmla="val 8000"/>
-            </a:avLst>
-          </a:prstGeom>
-          <a:solidFill>
-            <a:srgbClr val="FFFFFF"/>
-          </a:solidFill>
-          <a:ln w="9525">
-            <a:solidFill>
-              <a:srgbClr val="1A6FDB"/>
-            </a:solidFill>
-          </a:ln>
-        </p:spPr>
-        <p:style>
-          <a:lnRef idx="1">
-            <a:schemeClr val="accent1"/>
-          </a:lnRef>
-          <a:fillRef idx="3">
-            <a:schemeClr val="accent1"/>
-          </a:fillRef>
-          <a:effectRef idx="2">
-            <a:schemeClr val="accent1"/>
-          </a:effectRef>
-          <a:fontRef idx="minor">
-            <a:schemeClr val="lt1"/>
-          </a:fontRef>
-        </p:style>
-        <p:txBody>
-          <a:bodyPr rtlCol="0" anchor="ctr"/>
-          <a:lstStyle/>
-          <a:p>
-            <a:pPr algn="ctr"/>
-          </a:p>
-        </p:txBody>
-      </p:sp>
-      <p:cxnSp>
-        <p:nvCxnSpPr>
-          <p:cNvPr id="60" name="Connector 59"/>
-          <p:cNvCxnSpPr/>
-          <p:nvPr/>
-        </p:nvCxnSpPr>
-        <p:spPr>
-          <a:xfrm>
-            <a:off x="5212080" y="3265962"/>
-            <a:ext cx="0" cy="184343"/>
-          </a:xfrm>
-          <a:prstGeom prst="line">
-            <a:avLst/>
-          </a:prstGeom>
-          <a:ln w="9525">
-            <a:solidFill>
-              <a:srgbClr val="1A6FDB"/>
-            </a:solidFill>
-          </a:ln>
-        </p:spPr>
-        <p:style>
-          <a:lnRef idx="2">
-            <a:schemeClr val="accent1"/>
-          </a:lnRef>
-          <a:fillRef idx="0">
-            <a:schemeClr val="accent1"/>
-          </a:fillRef>
-          <a:effectRef idx="1">
-            <a:schemeClr val="accent1"/>
-          </a:effectRef>
-          <a:fontRef idx="minor">
-            <a:schemeClr val="tx1"/>
-          </a:fontRef>
-        </p:style>
-      </p:cxnSp>
-      <p:sp>
-        <p:nvSpPr>
-          <p:cNvPr id="61" name="TextBox 60"/>
+          <p:cNvPr id="54" name="TextBox 53"/>
           <p:cNvSpPr txBox="1"/>
           <p:nvPr/>
         </p:nvSpPr>
         <p:spPr>
           <a:xfrm>
-            <a:off x="5468112" y="3031236"/>
-            <a:ext cx="2679192" cy="653796"/>
+            <a:off x="9729215" y="2157984"/>
+            <a:ext cx="1920240" cy="438911"/>
           </a:xfrm>
           <a:prstGeom prst="rect">
             <a:avLst/>
@@ -6150,7 +5865,7 @@
           </a:bodyPr>
           <a:lstStyle/>
           <a:p>
-            <a:pPr algn="l">
+            <a:pPr algn="ctr">
               <a:spcBef>
                 <a:spcPts val="0"/>
               </a:spcBef>
@@ -6159,9 +5874,9 @@
               </a:spcAft>
             </a:pPr>
             <a:r>
-              <a:rPr sz="1400" b="1">
+              <a:rPr sz="1300" b="1">
                 <a:solidFill>
-                  <a:srgbClr val="16324A"/>
+                  <a:srgbClr val="0E2A47"/>
                 </a:solidFill>
                 <a:latin typeface="Noto Sans CJK SC"/>
                 <a:ea typeface="Noto Sans CJK SC"/>
@@ -6174,14 +5889,14 @@
       </p:sp>
       <p:sp>
         <p:nvSpPr>
-          <p:cNvPr id="62" name="Rounded Rectangle 61"/>
+          <p:cNvPr id="55" name="Rounded Rectangle 54"/>
           <p:cNvSpPr/>
           <p:nvPr/>
         </p:nvSpPr>
         <p:spPr>
           <a:xfrm>
-            <a:off x="4937760" y="3776472"/>
-            <a:ext cx="3319272" cy="653796"/>
+            <a:off x="7498079" y="2688336"/>
+            <a:ext cx="2066544" cy="438911"/>
           </a:xfrm>
           <a:prstGeom prst="roundRect">
             <a:avLst>
@@ -6219,174 +5934,14 @@
       </p:sp>
       <p:sp>
         <p:nvSpPr>
-          <p:cNvPr id="63" name="Oval 62"/>
-          <p:cNvSpPr/>
-          <p:nvPr/>
-        </p:nvSpPr>
-        <p:spPr>
-          <a:xfrm>
-            <a:off x="5047488" y="3938778"/>
-            <a:ext cx="329184" cy="329184"/>
-          </a:xfrm>
-          <a:prstGeom prst="ellipse">
-            <a:avLst/>
-          </a:prstGeom>
-          <a:solidFill>
-            <a:srgbClr val="E8F2FC"/>
-          </a:solidFill>
-          <a:ln>
-            <a:noFill/>
-          </a:ln>
-        </p:spPr>
-        <p:style>
-          <a:lnRef idx="1">
-            <a:schemeClr val="accent1"/>
-          </a:lnRef>
-          <a:fillRef idx="3">
-            <a:schemeClr val="accent1"/>
-          </a:fillRef>
-          <a:effectRef idx="2">
-            <a:schemeClr val="accent1"/>
-          </a:effectRef>
-          <a:fontRef idx="minor">
-            <a:schemeClr val="lt1"/>
-          </a:fontRef>
-        </p:style>
-        <p:txBody>
-          <a:bodyPr rtlCol="0" anchor="ctr"/>
-          <a:lstStyle/>
-          <a:p>
-            <a:pPr algn="ctr"/>
-          </a:p>
-        </p:txBody>
-      </p:sp>
-      <p:sp>
-        <p:nvSpPr>
-          <p:cNvPr id="64" name="Rounded Rectangle 63"/>
-          <p:cNvSpPr/>
-          <p:nvPr/>
-        </p:nvSpPr>
-        <p:spPr>
-          <a:xfrm>
-            <a:off x="5142029" y="4011198"/>
-            <a:ext cx="140100" cy="184343"/>
-          </a:xfrm>
-          <a:prstGeom prst="roundRect">
-            <a:avLst>
-              <a:gd name="adj" fmla="val 8000"/>
-            </a:avLst>
-          </a:prstGeom>
-          <a:solidFill>
-            <a:srgbClr val="FFFFFF"/>
-          </a:solidFill>
-          <a:ln w="9525">
-            <a:solidFill>
-              <a:srgbClr val="1A6FDB"/>
-            </a:solidFill>
-          </a:ln>
-        </p:spPr>
-        <p:style>
-          <a:lnRef idx="1">
-            <a:schemeClr val="accent1"/>
-          </a:lnRef>
-          <a:fillRef idx="3">
-            <a:schemeClr val="accent1"/>
-          </a:fillRef>
-          <a:effectRef idx="2">
-            <a:schemeClr val="accent1"/>
-          </a:effectRef>
-          <a:fontRef idx="minor">
-            <a:schemeClr val="lt1"/>
-          </a:fontRef>
-        </p:style>
-        <p:txBody>
-          <a:bodyPr rtlCol="0" anchor="ctr"/>
-          <a:lstStyle/>
-          <a:p>
-            <a:pPr algn="ctr"/>
-          </a:p>
-        </p:txBody>
-      </p:sp>
-      <p:cxnSp>
-        <p:nvCxnSpPr>
-          <p:cNvPr id="65" name="Connector 64"/>
-          <p:cNvCxnSpPr/>
-          <p:nvPr/>
-        </p:nvCxnSpPr>
-        <p:spPr>
-          <a:xfrm>
-            <a:off x="5171524" y="4070188"/>
-            <a:ext cx="81111" cy="0"/>
-          </a:xfrm>
-          <a:prstGeom prst="line">
-            <a:avLst/>
-          </a:prstGeom>
-          <a:ln w="9525">
-            <a:solidFill>
-              <a:srgbClr val="1A6FDB"/>
-            </a:solidFill>
-          </a:ln>
-        </p:spPr>
-        <p:style>
-          <a:lnRef idx="2">
-            <a:schemeClr val="accent1"/>
-          </a:lnRef>
-          <a:fillRef idx="0">
-            <a:schemeClr val="accent1"/>
-          </a:fillRef>
-          <a:effectRef idx="1">
-            <a:schemeClr val="accent1"/>
-          </a:effectRef>
-          <a:fontRef idx="minor">
-            <a:schemeClr val="tx1"/>
-          </a:fontRef>
-        </p:style>
-      </p:cxnSp>
-      <p:cxnSp>
-        <p:nvCxnSpPr>
-          <p:cNvPr id="66" name="Connector 65"/>
-          <p:cNvCxnSpPr/>
-          <p:nvPr/>
-        </p:nvCxnSpPr>
-        <p:spPr>
-          <a:xfrm>
-            <a:off x="5171524" y="4112587"/>
-            <a:ext cx="81111" cy="0"/>
-          </a:xfrm>
-          <a:prstGeom prst="line">
-            <a:avLst/>
-          </a:prstGeom>
-          <a:ln w="9525">
-            <a:solidFill>
-              <a:srgbClr val="1A6FDB"/>
-            </a:solidFill>
-          </a:ln>
-        </p:spPr>
-        <p:style>
-          <a:lnRef idx="2">
-            <a:schemeClr val="accent1"/>
-          </a:lnRef>
-          <a:fillRef idx="0">
-            <a:schemeClr val="accent1"/>
-          </a:fillRef>
-          <a:effectRef idx="1">
-            <a:schemeClr val="accent1"/>
-          </a:effectRef>
-          <a:fontRef idx="minor">
-            <a:schemeClr val="tx1"/>
-          </a:fontRef>
-        </p:style>
-      </p:cxnSp>
-      <p:sp>
-        <p:nvSpPr>
-          <p:cNvPr id="67" name="TextBox 66"/>
+          <p:cNvPr id="56" name="TextBox 55"/>
           <p:cNvSpPr txBox="1"/>
           <p:nvPr/>
         </p:nvSpPr>
         <p:spPr>
           <a:xfrm>
-            <a:off x="5468112" y="3776472"/>
-            <a:ext cx="2679192" cy="653796"/>
+            <a:off x="7571231" y="2688336"/>
+            <a:ext cx="1920240" cy="438911"/>
           </a:xfrm>
           <a:prstGeom prst="rect">
             <a:avLst/>
@@ -6399,7 +5954,7 @@
           </a:bodyPr>
           <a:lstStyle/>
           <a:p>
-            <a:pPr algn="l">
+            <a:pPr algn="ctr">
               <a:spcBef>
                 <a:spcPts val="0"/>
               </a:spcBef>
@@ -6408,9 +5963,9 @@
               </a:spcAft>
             </a:pPr>
             <a:r>
-              <a:rPr sz="1400" b="1">
+              <a:rPr sz="1300" b="1">
                 <a:solidFill>
-                  <a:srgbClr val="16324A"/>
+                  <a:srgbClr val="0E2A47"/>
                 </a:solidFill>
                 <a:latin typeface="Noto Sans CJK SC"/>
                 <a:ea typeface="Noto Sans CJK SC"/>
@@ -6423,14 +5978,14 @@
       </p:sp>
       <p:sp>
         <p:nvSpPr>
-          <p:cNvPr id="68" name="Rounded Rectangle 67"/>
+          <p:cNvPr id="57" name="Rounded Rectangle 56"/>
           <p:cNvSpPr/>
           <p:nvPr/>
         </p:nvSpPr>
         <p:spPr>
           <a:xfrm>
-            <a:off x="4937760" y="4521708"/>
-            <a:ext cx="3319272" cy="653796"/>
+            <a:off x="9656063" y="2688336"/>
+            <a:ext cx="2066544" cy="438911"/>
           </a:xfrm>
           <a:prstGeom prst="roundRect">
             <a:avLst>
@@ -6468,100 +6023,14 @@
       </p:sp>
       <p:sp>
         <p:nvSpPr>
-          <p:cNvPr id="69" name="Oval 68"/>
-          <p:cNvSpPr/>
-          <p:nvPr/>
-        </p:nvSpPr>
-        <p:spPr>
-          <a:xfrm>
-            <a:off x="5047488" y="4684014"/>
-            <a:ext cx="329184" cy="329184"/>
-          </a:xfrm>
-          <a:prstGeom prst="ellipse">
-            <a:avLst/>
-          </a:prstGeom>
-          <a:solidFill>
-            <a:srgbClr val="E8F2FC"/>
-          </a:solidFill>
-          <a:ln>
-            <a:noFill/>
-          </a:ln>
-        </p:spPr>
-        <p:style>
-          <a:lnRef idx="1">
-            <a:schemeClr val="accent1"/>
-          </a:lnRef>
-          <a:fillRef idx="3">
-            <a:schemeClr val="accent1"/>
-          </a:fillRef>
-          <a:effectRef idx="2">
-            <a:schemeClr val="accent1"/>
-          </a:effectRef>
-          <a:fontRef idx="minor">
-            <a:schemeClr val="lt1"/>
-          </a:fontRef>
-        </p:style>
-        <p:txBody>
-          <a:bodyPr rtlCol="0" anchor="ctr"/>
-          <a:lstStyle/>
-          <a:p>
-            <a:pPr algn="ctr"/>
-          </a:p>
-        </p:txBody>
-      </p:sp>
-      <p:sp>
-        <p:nvSpPr>
-          <p:cNvPr id="70" name="Can 69"/>
-          <p:cNvSpPr/>
-          <p:nvPr/>
-        </p:nvSpPr>
-        <p:spPr>
-          <a:xfrm>
-            <a:off x="5119908" y="4756434"/>
-            <a:ext cx="184343" cy="184343"/>
-          </a:xfrm>
-          <a:prstGeom prst="can">
-            <a:avLst/>
-          </a:prstGeom>
-          <a:solidFill>
-            <a:srgbClr val="1A6FDB"/>
-          </a:solidFill>
-          <a:ln>
-            <a:noFill/>
-          </a:ln>
-        </p:spPr>
-        <p:style>
-          <a:lnRef idx="1">
-            <a:schemeClr val="accent1"/>
-          </a:lnRef>
-          <a:fillRef idx="3">
-            <a:schemeClr val="accent1"/>
-          </a:fillRef>
-          <a:effectRef idx="2">
-            <a:schemeClr val="accent1"/>
-          </a:effectRef>
-          <a:fontRef idx="minor">
-            <a:schemeClr val="lt1"/>
-          </a:fontRef>
-        </p:style>
-        <p:txBody>
-          <a:bodyPr rtlCol="0" anchor="ctr"/>
-          <a:lstStyle/>
-          <a:p>
-            <a:pPr algn="ctr"/>
-          </a:p>
-        </p:txBody>
-      </p:sp>
-      <p:sp>
-        <p:nvSpPr>
-          <p:cNvPr id="71" name="TextBox 70"/>
+          <p:cNvPr id="58" name="TextBox 57"/>
           <p:cNvSpPr txBox="1"/>
           <p:nvPr/>
         </p:nvSpPr>
         <p:spPr>
           <a:xfrm>
-            <a:off x="5468112" y="4521708"/>
-            <a:ext cx="2679192" cy="653796"/>
+            <a:off x="9729215" y="2688336"/>
+            <a:ext cx="1920240" cy="438911"/>
           </a:xfrm>
           <a:prstGeom prst="rect">
             <a:avLst/>
@@ -6574,7 +6043,7 @@
           </a:bodyPr>
           <a:lstStyle/>
           <a:p>
-            <a:pPr algn="l">
+            <a:pPr algn="ctr">
               <a:spcBef>
                 <a:spcPts val="0"/>
               </a:spcBef>
@@ -6583,9 +6052,9 @@
               </a:spcAft>
             </a:pPr>
             <a:r>
-              <a:rPr sz="1400" b="1">
+              <a:rPr sz="1300" b="1">
                 <a:solidFill>
-                  <a:srgbClr val="16324A"/>
+                  <a:srgbClr val="0E2A47"/>
                 </a:solidFill>
                 <a:latin typeface="Noto Sans CJK SC"/>
                 <a:ea typeface="Noto Sans CJK SC"/>
@@ -6598,14 +6067,14 @@
       </p:sp>
       <p:sp>
         <p:nvSpPr>
-          <p:cNvPr id="72" name="Rounded Rectangle 71"/>
+          <p:cNvPr id="59" name="Rounded Rectangle 58"/>
           <p:cNvSpPr/>
           <p:nvPr/>
         </p:nvSpPr>
         <p:spPr>
           <a:xfrm>
-            <a:off x="8531352" y="1444752"/>
-            <a:ext cx="3310128" cy="3877056"/>
+            <a:off x="7351775" y="3364992"/>
+            <a:ext cx="4517136" cy="1975104"/>
           </a:xfrm>
           <a:prstGeom prst="roundRect">
             <a:avLst>
@@ -6652,14 +6121,14 @@
       </p:sp>
       <p:sp>
         <p:nvSpPr>
-          <p:cNvPr id="73" name="TextBox 72"/>
+          <p:cNvPr id="60" name="TextBox 59"/>
           <p:cNvSpPr txBox="1"/>
           <p:nvPr/>
         </p:nvSpPr>
         <p:spPr>
           <a:xfrm>
-            <a:off x="8677656" y="1536192"/>
-            <a:ext cx="3017520" cy="310896"/>
+            <a:off x="7498079" y="3438144"/>
+            <a:ext cx="4224528" cy="274320"/>
           </a:xfrm>
           <a:prstGeom prst="rect">
             <a:avLst/>
@@ -6696,14 +6165,14 @@
       </p:sp>
       <p:sp>
         <p:nvSpPr>
-          <p:cNvPr id="74" name="TextBox 73"/>
+          <p:cNvPr id="61" name="TextBox 60"/>
           <p:cNvSpPr txBox="1"/>
           <p:nvPr/>
         </p:nvSpPr>
         <p:spPr>
           <a:xfrm>
-            <a:off x="8677656" y="1847088"/>
-            <a:ext cx="3017520" cy="256032"/>
+            <a:off x="7498079" y="3712464"/>
+            <a:ext cx="4224528" cy="219456"/>
           </a:xfrm>
           <a:prstGeom prst="rect">
             <a:avLst/>
@@ -6740,14 +6209,14 @@
       </p:sp>
       <p:cxnSp>
         <p:nvCxnSpPr>
-          <p:cNvPr id="75" name="Connector 74"/>
+          <p:cNvPr id="62" name="Connector 61"/>
           <p:cNvCxnSpPr/>
           <p:nvPr/>
         </p:nvCxnSpPr>
         <p:spPr>
           <a:xfrm>
-            <a:off x="8677656" y="2176272"/>
-            <a:ext cx="3017520" cy="0"/>
+            <a:off x="7498079" y="3968496"/>
+            <a:ext cx="4224529" cy="0"/>
           </a:xfrm>
           <a:prstGeom prst="line">
             <a:avLst/>
@@ -6775,14 +6244,58 @@
       </p:cxnSp>
       <p:sp>
         <p:nvSpPr>
-          <p:cNvPr id="76" name="Rounded Rectangle 75"/>
+          <p:cNvPr id="63" name="TextBox 62"/>
+          <p:cNvSpPr txBox="1"/>
+          <p:nvPr/>
+        </p:nvSpPr>
+        <p:spPr>
+          <a:xfrm>
+            <a:off x="7498079" y="4059936"/>
+            <a:ext cx="2057400" cy="237744"/>
+          </a:xfrm>
+          <a:prstGeom prst="rect">
+            <a:avLst/>
+          </a:prstGeom>
+          <a:noFill/>
+        </p:spPr>
+        <p:txBody>
+          <a:bodyPr wrap="square" lIns="0" rIns="0" tIns="0" bIns="0" anchor="ctr">
+            <a:spAutoFit/>
+          </a:bodyPr>
+          <a:lstStyle/>
+          <a:p>
+            <a:pPr algn="l">
+              <a:spcBef>
+                <a:spcPts val="0"/>
+              </a:spcBef>
+              <a:spcAft>
+                <a:spcPts val="0"/>
+              </a:spcAft>
+            </a:pPr>
+            <a:r>
+              <a:rPr sz="1300" b="1">
+                <a:solidFill>
+                  <a:srgbClr val="1A6FDB"/>
+                </a:solidFill>
+                <a:latin typeface="Noto Sans CJK SC"/>
+                <a:ea typeface="Noto Sans CJK SC"/>
+                <a:cs typeface="Noto Sans CJK SC"/>
+              </a:rPr>
+              <a:t>连接</a:t>
+            </a:r>
+          </a:p>
+        </p:txBody>
+      </p:sp>
+      <p:sp>
+        <p:nvSpPr>
+          <p:cNvPr id="64" name="Rounded Rectangle 63"/>
           <p:cNvSpPr/>
           <p:nvPr/>
         </p:nvSpPr>
         <p:spPr>
           <a:xfrm>
-            <a:off x="8677656" y="2286000"/>
-            <a:ext cx="3017520" cy="653796"/>
+            <a:off x="7498079" y="4352544"/>
+            <a:ext cx="2057400" cy="365759"/>
           </a:xfrm>
           <a:prstGeom prst="roundRect">
             <a:avLst>
@@ -6820,192 +6333,14 @@
       </p:sp>
       <p:sp>
         <p:nvSpPr>
-          <p:cNvPr id="77" name="Oval 76"/>
-          <p:cNvSpPr/>
-          <p:nvPr/>
-        </p:nvSpPr>
-        <p:spPr>
-          <a:xfrm>
-            <a:off x="8787384" y="2448306"/>
-            <a:ext cx="329184" cy="329184"/>
-          </a:xfrm>
-          <a:prstGeom prst="ellipse">
-            <a:avLst/>
-          </a:prstGeom>
-          <a:solidFill>
-            <a:srgbClr val="E8F2FC"/>
-          </a:solidFill>
-          <a:ln>
-            <a:noFill/>
-          </a:ln>
-        </p:spPr>
-        <p:style>
-          <a:lnRef idx="1">
-            <a:schemeClr val="accent1"/>
-          </a:lnRef>
-          <a:fillRef idx="3">
-            <a:schemeClr val="accent1"/>
-          </a:fillRef>
-          <a:effectRef idx="2">
-            <a:schemeClr val="accent1"/>
-          </a:effectRef>
-          <a:fontRef idx="minor">
-            <a:schemeClr val="lt1"/>
-          </a:fontRef>
-        </p:style>
-        <p:txBody>
-          <a:bodyPr rtlCol="0" anchor="ctr"/>
-          <a:lstStyle/>
-          <a:p>
-            <a:pPr algn="ctr"/>
-          </a:p>
-        </p:txBody>
-      </p:sp>
-      <p:sp>
-        <p:nvSpPr>
-          <p:cNvPr id="78" name="Oval 77"/>
-          <p:cNvSpPr/>
-          <p:nvPr/>
-        </p:nvSpPr>
-        <p:spPr>
-          <a:xfrm>
-            <a:off x="8859804" y="2585246"/>
-            <a:ext cx="55302" cy="55302"/>
-          </a:xfrm>
-          <a:prstGeom prst="ellipse">
-            <a:avLst/>
-          </a:prstGeom>
-          <a:solidFill>
-            <a:srgbClr val="FFFFFF"/>
-          </a:solidFill>
-          <a:ln w="9525">
-            <a:solidFill>
-              <a:srgbClr val="1A6FDB"/>
-            </a:solidFill>
-          </a:ln>
-        </p:spPr>
-        <p:style>
-          <a:lnRef idx="1">
-            <a:schemeClr val="accent1"/>
-          </a:lnRef>
-          <a:fillRef idx="3">
-            <a:schemeClr val="accent1"/>
-          </a:fillRef>
-          <a:effectRef idx="2">
-            <a:schemeClr val="accent1"/>
-          </a:effectRef>
-          <a:fontRef idx="minor">
-            <a:schemeClr val="lt1"/>
-          </a:fontRef>
-        </p:style>
-        <p:txBody>
-          <a:bodyPr rtlCol="0" anchor="ctr"/>
-          <a:lstStyle/>
-          <a:p>
-            <a:pPr algn="ctr"/>
-          </a:p>
-        </p:txBody>
-      </p:sp>
-      <p:sp>
-        <p:nvSpPr>
-          <p:cNvPr id="79" name="Oval 78"/>
-          <p:cNvSpPr/>
-          <p:nvPr/>
-        </p:nvSpPr>
-        <p:spPr>
-          <a:xfrm>
-            <a:off x="8988844" y="2585246"/>
-            <a:ext cx="55302" cy="55302"/>
-          </a:xfrm>
-          <a:prstGeom prst="ellipse">
-            <a:avLst/>
-          </a:prstGeom>
-          <a:solidFill>
-            <a:srgbClr val="FFFFFF"/>
-          </a:solidFill>
-          <a:ln w="9525">
-            <a:solidFill>
-              <a:srgbClr val="1A6FDB"/>
-            </a:solidFill>
-          </a:ln>
-        </p:spPr>
-        <p:style>
-          <a:lnRef idx="1">
-            <a:schemeClr val="accent1"/>
-          </a:lnRef>
-          <a:fillRef idx="3">
-            <a:schemeClr val="accent1"/>
-          </a:fillRef>
-          <a:effectRef idx="2">
-            <a:schemeClr val="accent1"/>
-          </a:effectRef>
-          <a:fontRef idx="minor">
-            <a:schemeClr val="lt1"/>
-          </a:fontRef>
-        </p:style>
-        <p:txBody>
-          <a:bodyPr rtlCol="0" anchor="ctr"/>
-          <a:lstStyle/>
-          <a:p>
-            <a:pPr algn="ctr"/>
-          </a:p>
-        </p:txBody>
-      </p:sp>
-      <p:sp>
-        <p:nvSpPr>
-          <p:cNvPr id="80" name="Rounded Rectangle 79"/>
-          <p:cNvSpPr/>
-          <p:nvPr/>
-        </p:nvSpPr>
-        <p:spPr>
-          <a:xfrm>
-            <a:off x="8898516" y="2605524"/>
-            <a:ext cx="106918" cy="14747"/>
-          </a:xfrm>
-          <a:prstGeom prst="roundRect">
-            <a:avLst>
-              <a:gd name="adj" fmla="val 50000"/>
-            </a:avLst>
-          </a:prstGeom>
-          <a:solidFill>
-            <a:srgbClr val="1A6FDB"/>
-          </a:solidFill>
-          <a:ln>
-            <a:noFill/>
-          </a:ln>
-        </p:spPr>
-        <p:style>
-          <a:lnRef idx="1">
-            <a:schemeClr val="accent1"/>
-          </a:lnRef>
-          <a:fillRef idx="3">
-            <a:schemeClr val="accent1"/>
-          </a:fillRef>
-          <a:effectRef idx="2">
-            <a:schemeClr val="accent1"/>
-          </a:effectRef>
-          <a:fontRef idx="minor">
-            <a:schemeClr val="lt1"/>
-          </a:fontRef>
-        </p:style>
-        <p:txBody>
-          <a:bodyPr rtlCol="0" anchor="ctr"/>
-          <a:lstStyle/>
-          <a:p>
-            <a:pPr algn="ctr"/>
-          </a:p>
-        </p:txBody>
-      </p:sp>
-      <p:sp>
-        <p:nvSpPr>
-          <p:cNvPr id="81" name="TextBox 80"/>
+          <p:cNvPr id="65" name="TextBox 64"/>
           <p:cNvSpPr txBox="1"/>
           <p:nvPr/>
         </p:nvSpPr>
         <p:spPr>
           <a:xfrm>
-            <a:off x="9208008" y="2286000"/>
-            <a:ext cx="2377440" cy="653796"/>
+            <a:off x="7571231" y="4352544"/>
+            <a:ext cx="1911095" cy="365759"/>
           </a:xfrm>
           <a:prstGeom prst="rect">
             <a:avLst/>
@@ -7018,7 +6353,7 @@
           </a:bodyPr>
           <a:lstStyle/>
           <a:p>
-            <a:pPr algn="l">
+            <a:pPr algn="ctr">
               <a:spcBef>
                 <a:spcPts val="0"/>
               </a:spcBef>
@@ -7027,7 +6362,7 @@
               </a:spcAft>
             </a:pPr>
             <a:r>
-              <a:rPr sz="1400" b="1">
+              <a:rPr sz="1300" b="1">
                 <a:solidFill>
                   <a:srgbClr val="16324A"/>
                 </a:solidFill>
@@ -7042,14 +6377,14 @@
       </p:sp>
       <p:sp>
         <p:nvSpPr>
-          <p:cNvPr id="82" name="Rounded Rectangle 81"/>
+          <p:cNvPr id="66" name="Rounded Rectangle 65"/>
           <p:cNvSpPr/>
           <p:nvPr/>
         </p:nvSpPr>
         <p:spPr>
           <a:xfrm>
-            <a:off x="8677656" y="3031236"/>
-            <a:ext cx="3017520" cy="653796"/>
+            <a:off x="7498079" y="4828032"/>
+            <a:ext cx="2057400" cy="365759"/>
           </a:xfrm>
           <a:prstGeom prst="roundRect">
             <a:avLst>
@@ -7087,100 +6422,14 @@
       </p:sp>
       <p:sp>
         <p:nvSpPr>
-          <p:cNvPr id="83" name="Oval 82"/>
-          <p:cNvSpPr/>
-          <p:nvPr/>
-        </p:nvSpPr>
-        <p:spPr>
-          <a:xfrm>
-            <a:off x="8787384" y="3193542"/>
-            <a:ext cx="329184" cy="329184"/>
-          </a:xfrm>
-          <a:prstGeom prst="ellipse">
-            <a:avLst/>
-          </a:prstGeom>
-          <a:solidFill>
-            <a:srgbClr val="E8F2FC"/>
-          </a:solidFill>
-          <a:ln>
-            <a:noFill/>
-          </a:ln>
-        </p:spPr>
-        <p:style>
-          <a:lnRef idx="1">
-            <a:schemeClr val="accent1"/>
-          </a:lnRef>
-          <a:fillRef idx="3">
-            <a:schemeClr val="accent1"/>
-          </a:fillRef>
-          <a:effectRef idx="2">
-            <a:schemeClr val="accent1"/>
-          </a:effectRef>
-          <a:fontRef idx="minor">
-            <a:schemeClr val="lt1"/>
-          </a:fontRef>
-        </p:style>
-        <p:txBody>
-          <a:bodyPr rtlCol="0" anchor="ctr"/>
-          <a:lstStyle/>
-          <a:p>
-            <a:pPr algn="ctr"/>
-          </a:p>
-        </p:txBody>
-      </p:sp>
-      <p:sp>
-        <p:nvSpPr>
-          <p:cNvPr id="84" name="Right Arrow 83"/>
-          <p:cNvSpPr/>
-          <p:nvPr/>
-        </p:nvSpPr>
-        <p:spPr>
-          <a:xfrm>
-            <a:off x="8859804" y="3317578"/>
-            <a:ext cx="184343" cy="81110"/>
-          </a:xfrm>
-          <a:prstGeom prst="rightArrow">
-            <a:avLst/>
-          </a:prstGeom>
-          <a:solidFill>
-            <a:srgbClr val="1A6FDB"/>
-          </a:solidFill>
-          <a:ln>
-            <a:noFill/>
-          </a:ln>
-        </p:spPr>
-        <p:style>
-          <a:lnRef idx="1">
-            <a:schemeClr val="accent1"/>
-          </a:lnRef>
-          <a:fillRef idx="3">
-            <a:schemeClr val="accent1"/>
-          </a:fillRef>
-          <a:effectRef idx="2">
-            <a:schemeClr val="accent1"/>
-          </a:effectRef>
-          <a:fontRef idx="minor">
-            <a:schemeClr val="lt1"/>
-          </a:fontRef>
-        </p:style>
-        <p:txBody>
-          <a:bodyPr rtlCol="0" anchor="ctr"/>
-          <a:lstStyle/>
-          <a:p>
-            <a:pPr algn="ctr"/>
-          </a:p>
-        </p:txBody>
-      </p:sp>
-      <p:sp>
-        <p:nvSpPr>
-          <p:cNvPr id="85" name="TextBox 84"/>
+          <p:cNvPr id="67" name="TextBox 66"/>
           <p:cNvSpPr txBox="1"/>
           <p:nvPr/>
         </p:nvSpPr>
         <p:spPr>
           <a:xfrm>
-            <a:off x="9208008" y="3031236"/>
-            <a:ext cx="2377440" cy="653796"/>
+            <a:off x="7571231" y="4828032"/>
+            <a:ext cx="1911095" cy="365759"/>
           </a:xfrm>
           <a:prstGeom prst="rect">
             <a:avLst/>
@@ -7193,7 +6442,7 @@
           </a:bodyPr>
           <a:lstStyle/>
           <a:p>
-            <a:pPr algn="l">
+            <a:pPr algn="ctr">
               <a:spcBef>
                 <a:spcPts val="0"/>
               </a:spcBef>
@@ -7202,7 +6451,7 @@
               </a:spcAft>
             </a:pPr>
             <a:r>
-              <a:rPr sz="1400" b="1">
+              <a:rPr sz="1300" b="1">
                 <a:solidFill>
                   <a:srgbClr val="16324A"/>
                 </a:solidFill>
@@ -7217,14 +6466,58 @@
       </p:sp>
       <p:sp>
         <p:nvSpPr>
-          <p:cNvPr id="86" name="Rounded Rectangle 85"/>
+          <p:cNvPr id="68" name="TextBox 67"/>
+          <p:cNvSpPr txBox="1"/>
+          <p:nvPr/>
+        </p:nvSpPr>
+        <p:spPr>
+          <a:xfrm>
+            <a:off x="9665208" y="4059936"/>
+            <a:ext cx="2057400" cy="237744"/>
+          </a:xfrm>
+          <a:prstGeom prst="rect">
+            <a:avLst/>
+          </a:prstGeom>
+          <a:noFill/>
+        </p:spPr>
+        <p:txBody>
+          <a:bodyPr wrap="square" lIns="0" rIns="0" tIns="0" bIns="0" anchor="ctr">
+            <a:spAutoFit/>
+          </a:bodyPr>
+          <a:lstStyle/>
+          <a:p>
+            <a:pPr algn="l">
+              <a:spcBef>
+                <a:spcPts val="0"/>
+              </a:spcBef>
+              <a:spcAft>
+                <a:spcPts val="0"/>
+              </a:spcAft>
+            </a:pPr>
+            <a:r>
+              <a:rPr sz="1300" b="1">
+                <a:solidFill>
+                  <a:srgbClr val="1A6FDB"/>
+                </a:solidFill>
+                <a:latin typeface="Noto Sans CJK SC"/>
+                <a:ea typeface="Noto Sans CJK SC"/>
+                <a:cs typeface="Noto Sans CJK SC"/>
+              </a:rPr>
+              <a:t>运营</a:t>
+            </a:r>
+          </a:p>
+        </p:txBody>
+      </p:sp>
+      <p:sp>
+        <p:nvSpPr>
+          <p:cNvPr id="69" name="Rounded Rectangle 68"/>
           <p:cNvSpPr/>
           <p:nvPr/>
         </p:nvSpPr>
         <p:spPr>
           <a:xfrm>
-            <a:off x="8677656" y="3776472"/>
-            <a:ext cx="3017520" cy="653796"/>
+            <a:off x="9665208" y="4352544"/>
+            <a:ext cx="2057400" cy="365759"/>
           </a:xfrm>
           <a:prstGeom prst="roundRect">
             <a:avLst>
@@ -7262,174 +6555,14 @@
       </p:sp>
       <p:sp>
         <p:nvSpPr>
-          <p:cNvPr id="87" name="Oval 86"/>
-          <p:cNvSpPr/>
-          <p:nvPr/>
-        </p:nvSpPr>
-        <p:spPr>
-          <a:xfrm>
-            <a:off x="8787384" y="3938778"/>
-            <a:ext cx="329184" cy="329184"/>
-          </a:xfrm>
-          <a:prstGeom prst="ellipse">
-            <a:avLst/>
-          </a:prstGeom>
-          <a:solidFill>
-            <a:srgbClr val="E8F2FC"/>
-          </a:solidFill>
-          <a:ln>
-            <a:noFill/>
-          </a:ln>
-        </p:spPr>
-        <p:style>
-          <a:lnRef idx="1">
-            <a:schemeClr val="accent1"/>
-          </a:lnRef>
-          <a:fillRef idx="3">
-            <a:schemeClr val="accent1"/>
-          </a:fillRef>
-          <a:effectRef idx="2">
-            <a:schemeClr val="accent1"/>
-          </a:effectRef>
-          <a:fontRef idx="minor">
-            <a:schemeClr val="lt1"/>
-          </a:fontRef>
-        </p:style>
-        <p:txBody>
-          <a:bodyPr rtlCol="0" anchor="ctr"/>
-          <a:lstStyle/>
-          <a:p>
-            <a:pPr algn="ctr"/>
-          </a:p>
-        </p:txBody>
-      </p:sp>
-      <p:sp>
-        <p:nvSpPr>
-          <p:cNvPr id="88" name="Rounded Rectangle 87"/>
-          <p:cNvSpPr/>
-          <p:nvPr/>
-        </p:nvSpPr>
-        <p:spPr>
-          <a:xfrm>
-            <a:off x="8859804" y="4011198"/>
-            <a:ext cx="184343" cy="184343"/>
-          </a:xfrm>
-          <a:prstGeom prst="roundRect">
-            <a:avLst>
-              <a:gd name="adj" fmla="val 16000"/>
-            </a:avLst>
-          </a:prstGeom>
-          <a:solidFill>
-            <a:srgbClr val="FFFFFF"/>
-          </a:solidFill>
-          <a:ln w="9525">
-            <a:solidFill>
-              <a:srgbClr val="1A6FDB"/>
-            </a:solidFill>
-          </a:ln>
-        </p:spPr>
-        <p:style>
-          <a:lnRef idx="1">
-            <a:schemeClr val="accent1"/>
-          </a:lnRef>
-          <a:fillRef idx="3">
-            <a:schemeClr val="accent1"/>
-          </a:fillRef>
-          <a:effectRef idx="2">
-            <a:schemeClr val="accent1"/>
-          </a:effectRef>
-          <a:fontRef idx="minor">
-            <a:schemeClr val="lt1"/>
-          </a:fontRef>
-        </p:style>
-        <p:txBody>
-          <a:bodyPr rtlCol="0" anchor="ctr"/>
-          <a:lstStyle/>
-          <a:p>
-            <a:pPr algn="ctr"/>
-          </a:p>
-        </p:txBody>
-      </p:sp>
-      <p:cxnSp>
-        <p:nvCxnSpPr>
-          <p:cNvPr id="89" name="Connector 88"/>
-          <p:cNvCxnSpPr/>
-          <p:nvPr/>
-        </p:nvCxnSpPr>
-        <p:spPr>
-          <a:xfrm>
-            <a:off x="8904046" y="4107056"/>
-            <a:ext cx="36869" cy="36869"/>
-          </a:xfrm>
-          <a:prstGeom prst="line">
-            <a:avLst/>
-          </a:prstGeom>
-          <a:ln w="9525">
-            <a:solidFill>
-              <a:srgbClr val="1A6FDB"/>
-            </a:solidFill>
-          </a:ln>
-        </p:spPr>
-        <p:style>
-          <a:lnRef idx="2">
-            <a:schemeClr val="accent1"/>
-          </a:lnRef>
-          <a:fillRef idx="0">
-            <a:schemeClr val="accent1"/>
-          </a:fillRef>
-          <a:effectRef idx="1">
-            <a:schemeClr val="accent1"/>
-          </a:effectRef>
-          <a:fontRef idx="minor">
-            <a:schemeClr val="tx1"/>
-          </a:fontRef>
-        </p:style>
-      </p:cxnSp>
-      <p:cxnSp>
-        <p:nvCxnSpPr>
-          <p:cNvPr id="90" name="Connector 89"/>
-          <p:cNvCxnSpPr/>
-          <p:nvPr/>
-        </p:nvCxnSpPr>
-        <p:spPr>
-          <a:xfrm flipV="1">
-            <a:off x="8940915" y="4062814"/>
-            <a:ext cx="62677" cy="81111"/>
-          </a:xfrm>
-          <a:prstGeom prst="line">
-            <a:avLst/>
-          </a:prstGeom>
-          <a:ln w="9525">
-            <a:solidFill>
-              <a:srgbClr val="1A6FDB"/>
-            </a:solidFill>
-          </a:ln>
-        </p:spPr>
-        <p:style>
-          <a:lnRef idx="2">
-            <a:schemeClr val="accent1"/>
-          </a:lnRef>
-          <a:fillRef idx="0">
-            <a:schemeClr val="accent1"/>
-          </a:fillRef>
-          <a:effectRef idx="1">
-            <a:schemeClr val="accent1"/>
-          </a:effectRef>
-          <a:fontRef idx="minor">
-            <a:schemeClr val="tx1"/>
-          </a:fontRef>
-        </p:style>
-      </p:cxnSp>
-      <p:sp>
-        <p:nvSpPr>
-          <p:cNvPr id="91" name="TextBox 90"/>
+          <p:cNvPr id="70" name="TextBox 69"/>
           <p:cNvSpPr txBox="1"/>
           <p:nvPr/>
         </p:nvSpPr>
         <p:spPr>
           <a:xfrm>
-            <a:off x="9208008" y="3776472"/>
-            <a:ext cx="2377440" cy="653796"/>
+            <a:off x="9738360" y="4352544"/>
+            <a:ext cx="1911095" cy="365759"/>
           </a:xfrm>
           <a:prstGeom prst="rect">
             <a:avLst/>
@@ -7442,7 +6575,7 @@
           </a:bodyPr>
           <a:lstStyle/>
           <a:p>
-            <a:pPr algn="l">
+            <a:pPr algn="ctr">
               <a:spcBef>
                 <a:spcPts val="0"/>
               </a:spcBef>
@@ -7451,7 +6584,7 @@
               </a:spcAft>
             </a:pPr>
             <a:r>
-              <a:rPr sz="1400" b="1">
+              <a:rPr sz="1300" b="1">
                 <a:solidFill>
                   <a:srgbClr val="16324A"/>
                 </a:solidFill>
@@ -7466,14 +6599,14 @@
       </p:sp>
       <p:sp>
         <p:nvSpPr>
-          <p:cNvPr id="92" name="Rounded Rectangle 91"/>
+          <p:cNvPr id="71" name="Rounded Rectangle 70"/>
           <p:cNvSpPr/>
           <p:nvPr/>
         </p:nvSpPr>
         <p:spPr>
           <a:xfrm>
-            <a:off x="8677656" y="4521708"/>
-            <a:ext cx="3017520" cy="653796"/>
+            <a:off x="9665208" y="4828032"/>
+            <a:ext cx="2057400" cy="365759"/>
           </a:xfrm>
           <a:prstGeom prst="roundRect">
             <a:avLst>
@@ -7511,174 +6644,14 @@
       </p:sp>
       <p:sp>
         <p:nvSpPr>
-          <p:cNvPr id="93" name="Oval 92"/>
-          <p:cNvSpPr/>
-          <p:nvPr/>
-        </p:nvSpPr>
-        <p:spPr>
-          <a:xfrm>
-            <a:off x="8787384" y="4684014"/>
-            <a:ext cx="329184" cy="329184"/>
-          </a:xfrm>
-          <a:prstGeom prst="ellipse">
-            <a:avLst/>
-          </a:prstGeom>
-          <a:solidFill>
-            <a:srgbClr val="E8F2FC"/>
-          </a:solidFill>
-          <a:ln>
-            <a:noFill/>
-          </a:ln>
-        </p:spPr>
-        <p:style>
-          <a:lnRef idx="1">
-            <a:schemeClr val="accent1"/>
-          </a:lnRef>
-          <a:fillRef idx="3">
-            <a:schemeClr val="accent1"/>
-          </a:fillRef>
-          <a:effectRef idx="2">
-            <a:schemeClr val="accent1"/>
-          </a:effectRef>
-          <a:fontRef idx="minor">
-            <a:schemeClr val="lt1"/>
-          </a:fontRef>
-        </p:style>
-        <p:txBody>
-          <a:bodyPr rtlCol="0" anchor="ctr"/>
-          <a:lstStyle/>
-          <a:p>
-            <a:pPr algn="ctr"/>
-          </a:p>
-        </p:txBody>
-      </p:sp>
-      <p:sp>
-        <p:nvSpPr>
-          <p:cNvPr id="94" name="Rounded Rectangle 93"/>
-          <p:cNvSpPr/>
-          <p:nvPr/>
-        </p:nvSpPr>
-        <p:spPr>
-          <a:xfrm>
-            <a:off x="8859804" y="4756434"/>
-            <a:ext cx="184343" cy="184343"/>
-          </a:xfrm>
-          <a:prstGeom prst="roundRect">
-            <a:avLst>
-              <a:gd name="adj" fmla="val 8000"/>
-            </a:avLst>
-          </a:prstGeom>
-          <a:solidFill>
-            <a:srgbClr val="FFFFFF"/>
-          </a:solidFill>
-          <a:ln w="9525">
-            <a:solidFill>
-              <a:srgbClr val="1A6FDB"/>
-            </a:solidFill>
-          </a:ln>
-        </p:spPr>
-        <p:style>
-          <a:lnRef idx="1">
-            <a:schemeClr val="accent1"/>
-          </a:lnRef>
-          <a:fillRef idx="3">
-            <a:schemeClr val="accent1"/>
-          </a:fillRef>
-          <a:effectRef idx="2">
-            <a:schemeClr val="accent1"/>
-          </a:effectRef>
-          <a:fontRef idx="minor">
-            <a:schemeClr val="lt1"/>
-          </a:fontRef>
-        </p:style>
-        <p:txBody>
-          <a:bodyPr rtlCol="0" anchor="ctr"/>
-          <a:lstStyle/>
-          <a:p>
-            <a:pPr algn="ctr"/>
-          </a:p>
-        </p:txBody>
-      </p:sp>
-      <p:cxnSp>
-        <p:nvCxnSpPr>
-          <p:cNvPr id="95" name="Connector 94"/>
-          <p:cNvCxnSpPr/>
-          <p:nvPr/>
-        </p:nvCxnSpPr>
-        <p:spPr>
-          <a:xfrm>
-            <a:off x="8859804" y="4826484"/>
-            <a:ext cx="184343" cy="0"/>
-          </a:xfrm>
-          <a:prstGeom prst="line">
-            <a:avLst/>
-          </a:prstGeom>
-          <a:ln w="9525">
-            <a:solidFill>
-              <a:srgbClr val="1A6FDB"/>
-            </a:solidFill>
-          </a:ln>
-        </p:spPr>
-        <p:style>
-          <a:lnRef idx="2">
-            <a:schemeClr val="accent1"/>
-          </a:lnRef>
-          <a:fillRef idx="0">
-            <a:schemeClr val="accent1"/>
-          </a:fillRef>
-          <a:effectRef idx="1">
-            <a:schemeClr val="accent1"/>
-          </a:effectRef>
-          <a:fontRef idx="minor">
-            <a:schemeClr val="tx1"/>
-          </a:fontRef>
-        </p:style>
-      </p:cxnSp>
-      <p:cxnSp>
-        <p:nvCxnSpPr>
-          <p:cNvPr id="96" name="Connector 95"/>
-          <p:cNvCxnSpPr/>
-          <p:nvPr/>
-        </p:nvCxnSpPr>
-        <p:spPr>
-          <a:xfrm>
-            <a:off x="8859804" y="4881787"/>
-            <a:ext cx="184343" cy="0"/>
-          </a:xfrm>
-          <a:prstGeom prst="line">
-            <a:avLst/>
-          </a:prstGeom>
-          <a:ln w="9525">
-            <a:solidFill>
-              <a:srgbClr val="1A6FDB"/>
-            </a:solidFill>
-          </a:ln>
-        </p:spPr>
-        <p:style>
-          <a:lnRef idx="2">
-            <a:schemeClr val="accent1"/>
-          </a:lnRef>
-          <a:fillRef idx="0">
-            <a:schemeClr val="accent1"/>
-          </a:fillRef>
-          <a:effectRef idx="1">
-            <a:schemeClr val="accent1"/>
-          </a:effectRef>
-          <a:fontRef idx="minor">
-            <a:schemeClr val="tx1"/>
-          </a:fontRef>
-        </p:style>
-      </p:cxnSp>
-      <p:sp>
-        <p:nvSpPr>
-          <p:cNvPr id="97" name="TextBox 96"/>
+          <p:cNvPr id="72" name="TextBox 71"/>
           <p:cNvSpPr txBox="1"/>
           <p:nvPr/>
         </p:nvSpPr>
         <p:spPr>
           <a:xfrm>
-            <a:off x="9208008" y="4521708"/>
-            <a:ext cx="2377440" cy="653796"/>
+            <a:off x="9738360" y="4828032"/>
+            <a:ext cx="1911095" cy="365759"/>
           </a:xfrm>
           <a:prstGeom prst="rect">
             <a:avLst/>
@@ -7691,7 +6664,7 @@
           </a:bodyPr>
           <a:lstStyle/>
           <a:p>
-            <a:pPr algn="l">
+            <a:pPr algn="ctr">
               <a:spcBef>
                 <a:spcPts val="0"/>
               </a:spcBef>
@@ -7700,7 +6673,7 @@
               </a:spcAft>
             </a:pPr>
             <a:r>
-              <a:rPr sz="1400" b="1">
+              <a:rPr sz="1300" b="1">
                 <a:solidFill>
                   <a:srgbClr val="16324A"/>
                 </a:solidFill>
@@ -7715,7 +6688,7 @@
       </p:sp>
       <p:sp>
         <p:nvSpPr>
-          <p:cNvPr id="98" name="Rounded Rectangle 97"/>
+          <p:cNvPr id="73" name="Rounded Rectangle 72"/>
           <p:cNvSpPr/>
           <p:nvPr/>
         </p:nvSpPr>
@@ -7769,7 +6742,7 @@
       </p:sp>
       <p:sp>
         <p:nvSpPr>
-          <p:cNvPr id="99" name="TextBox 98"/>
+          <p:cNvPr id="74" name="TextBox 73"/>
           <p:cNvSpPr txBox="1"/>
           <p:nvPr/>
         </p:nvSpPr>
@@ -7813,7 +6786,7 @@
       </p:sp>
       <p:sp>
         <p:nvSpPr>
-          <p:cNvPr id="100" name="Rounded Rectangle 99"/>
+          <p:cNvPr id="75" name="Rounded Rectangle 74"/>
           <p:cNvSpPr/>
           <p:nvPr/>
         </p:nvSpPr>
@@ -7858,7 +6831,7 @@
       </p:sp>
       <p:sp>
         <p:nvSpPr>
-          <p:cNvPr id="101" name="TextBox 100"/>
+          <p:cNvPr id="76" name="TextBox 75"/>
           <p:cNvSpPr txBox="1"/>
           <p:nvPr/>
         </p:nvSpPr>
@@ -7902,7 +6875,7 @@
       </p:sp>
       <p:sp>
         <p:nvSpPr>
-          <p:cNvPr id="102" name="Rounded Rectangle 101"/>
+          <p:cNvPr id="77" name="Rounded Rectangle 76"/>
           <p:cNvSpPr/>
           <p:nvPr/>
         </p:nvSpPr>
@@ -7947,7 +6920,7 @@
       </p:sp>
       <p:sp>
         <p:nvSpPr>
-          <p:cNvPr id="103" name="TextBox 102"/>
+          <p:cNvPr id="78" name="TextBox 77"/>
           <p:cNvSpPr txBox="1"/>
           <p:nvPr/>
         </p:nvSpPr>
@@ -7991,7 +6964,7 @@
       </p:sp>
       <p:sp>
         <p:nvSpPr>
-          <p:cNvPr id="104" name="Rounded Rectangle 103"/>
+          <p:cNvPr id="79" name="Rounded Rectangle 78"/>
           <p:cNvSpPr/>
           <p:nvPr/>
         </p:nvSpPr>
@@ -8036,7 +7009,7 @@
       </p:sp>
       <p:sp>
         <p:nvSpPr>
-          <p:cNvPr id="105" name="TextBox 104"/>
+          <p:cNvPr id="80" name="TextBox 79"/>
           <p:cNvSpPr txBox="1"/>
           <p:nvPr/>
         </p:nvSpPr>
@@ -8080,7 +7053,7 @@
       </p:sp>
       <p:sp>
         <p:nvSpPr>
-          <p:cNvPr id="106" name="Rounded Rectangle 105"/>
+          <p:cNvPr id="81" name="Rounded Rectangle 80"/>
           <p:cNvSpPr/>
           <p:nvPr/>
         </p:nvSpPr>
@@ -8125,7 +7098,7 @@
       </p:sp>
       <p:sp>
         <p:nvSpPr>
-          <p:cNvPr id="107" name="TextBox 106"/>
+          <p:cNvPr id="82" name="TextBox 81"/>
           <p:cNvSpPr txBox="1"/>
           <p:nvPr/>
         </p:nvSpPr>
@@ -8169,7 +7142,7 @@
       </p:sp>
       <p:sp>
         <p:nvSpPr>
-          <p:cNvPr id="108" name="TextBox 107"/>
+          <p:cNvPr id="83" name="TextBox 82"/>
           <p:cNvSpPr txBox="1"/>
           <p:nvPr/>
         </p:nvSpPr>
@@ -8213,7 +7186,7 @@
       </p:sp>
       <p:sp>
         <p:nvSpPr>
-          <p:cNvPr id="109" name="TextBox 108"/>
+          <p:cNvPr id="84" name="TextBox 83"/>
           <p:cNvSpPr txBox="1"/>
           <p:nvPr/>
         </p:nvSpPr>
@@ -8257,7 +7230,7 @@
       </p:sp>
       <p:sp>
         <p:nvSpPr>
-          <p:cNvPr id="110" name="TextBox 109"/>
+          <p:cNvPr id="85" name="TextBox 84"/>
           <p:cNvSpPr txBox="1"/>
           <p:nvPr/>
         </p:nvSpPr>
